--- a/fig/chapter5/第五章系统框架图.pptx
+++ b/fig/chapter5/第五章系统框架图.pptx
@@ -2,12 +2,12 @@
 <file path=ppt/presentation.xml><?xml version="1.0" encoding="utf-8"?>
 <p:presentation xmlns:a="http://schemas.openxmlformats.org/drawingml/2006/main" xmlns:r="http://schemas.openxmlformats.org/officeDocument/2006/relationships" xmlns:p="http://schemas.openxmlformats.org/presentationml/2006/main" saveSubsetFonts="1">
   <p:sldMasterIdLst>
-    <p:sldMasterId id="2147483660" r:id="rId1"/>
+    <p:sldMasterId id="2147483672" r:id="rId1"/>
   </p:sldMasterIdLst>
   <p:sldIdLst>
     <p:sldId id="256" r:id="rId2"/>
   </p:sldIdLst>
-  <p:sldSz cx="6480175" cy="6119813"/>
+  <p:sldSz cx="6480175" cy="5759450"/>
   <p:notesSz cx="6858000" cy="9144000"/>
   <p:defaultTextStyle>
     <a:defPPr>
@@ -141,8 +141,8 @@
         </p:nvSpPr>
         <p:spPr>
           <a:xfrm>
-            <a:off x="486013" y="1001553"/>
-            <a:ext cx="5508149" cy="2130602"/>
+            <a:off x="486013" y="942577"/>
+            <a:ext cx="5508149" cy="2005142"/>
           </a:xfrm>
         </p:spPr>
         <p:txBody>
@@ -173,8 +173,8 @@
         </p:nvSpPr>
         <p:spPr>
           <a:xfrm>
-            <a:off x="810022" y="3214319"/>
-            <a:ext cx="4860131" cy="1477538"/>
+            <a:off x="810022" y="3025045"/>
+            <a:ext cx="4860131" cy="1390533"/>
           </a:xfrm>
         </p:spPr>
         <p:txBody>
@@ -243,7 +243,7 @@
           <a:p>
             <a:fld id="{6ACDD3C1-6DED-4D92-A071-E0E7C825E60C}" type="datetimeFigureOut">
               <a:rPr lang="zh-CN" altLang="en-US" smtClean="0"/>
-              <a:t>2026/3/17</a:t>
+              <a:t>2026/3/19</a:t>
             </a:fld>
             <a:endParaRPr lang="zh-CN" altLang="en-US"/>
           </a:p>
@@ -294,7 +294,7 @@
     </p:spTree>
     <p:extLst>
       <p:ext uri="{BB962C8B-B14F-4D97-AF65-F5344CB8AC3E}">
-        <p14:creationId xmlns:p14="http://schemas.microsoft.com/office/powerpoint/2010/main" val="2201692993"/>
+        <p14:creationId xmlns:p14="http://schemas.microsoft.com/office/powerpoint/2010/main" val="530726247"/>
       </p:ext>
     </p:extLst>
   </p:cSld>
@@ -413,7 +413,7 @@
           <a:p>
             <a:fld id="{6ACDD3C1-6DED-4D92-A071-E0E7C825E60C}" type="datetimeFigureOut">
               <a:rPr lang="zh-CN" altLang="en-US" smtClean="0"/>
-              <a:t>2026/3/17</a:t>
+              <a:t>2026/3/19</a:t>
             </a:fld>
             <a:endParaRPr lang="zh-CN" altLang="en-US"/>
           </a:p>
@@ -464,7 +464,7 @@
     </p:spTree>
     <p:extLst>
       <p:ext uri="{BB962C8B-B14F-4D97-AF65-F5344CB8AC3E}">
-        <p14:creationId xmlns:p14="http://schemas.microsoft.com/office/powerpoint/2010/main" val="3647958582"/>
+        <p14:creationId xmlns:p14="http://schemas.microsoft.com/office/powerpoint/2010/main" val="1211650298"/>
       </p:ext>
     </p:extLst>
   </p:cSld>
@@ -503,8 +503,8 @@
         </p:nvSpPr>
         <p:spPr>
           <a:xfrm>
-            <a:off x="4637375" y="325823"/>
-            <a:ext cx="1397288" cy="5186259"/>
+            <a:off x="4637375" y="306637"/>
+            <a:ext cx="1397288" cy="4880868"/>
           </a:xfrm>
         </p:spPr>
         <p:txBody>
@@ -531,8 +531,8 @@
         </p:nvSpPr>
         <p:spPr>
           <a:xfrm>
-            <a:off x="445512" y="325823"/>
-            <a:ext cx="4110861" cy="5186259"/>
+            <a:off x="445512" y="306637"/>
+            <a:ext cx="4110861" cy="4880868"/>
           </a:xfrm>
         </p:spPr>
         <p:txBody>
@@ -593,7 +593,7 @@
           <a:p>
             <a:fld id="{6ACDD3C1-6DED-4D92-A071-E0E7C825E60C}" type="datetimeFigureOut">
               <a:rPr lang="zh-CN" altLang="en-US" smtClean="0"/>
-              <a:t>2026/3/17</a:t>
+              <a:t>2026/3/19</a:t>
             </a:fld>
             <a:endParaRPr lang="zh-CN" altLang="en-US"/>
           </a:p>
@@ -644,7 +644,7 @@
     </p:spTree>
     <p:extLst>
       <p:ext uri="{BB962C8B-B14F-4D97-AF65-F5344CB8AC3E}">
-        <p14:creationId xmlns:p14="http://schemas.microsoft.com/office/powerpoint/2010/main" val="2147939214"/>
+        <p14:creationId xmlns:p14="http://schemas.microsoft.com/office/powerpoint/2010/main" val="4206073480"/>
       </p:ext>
     </p:extLst>
   </p:cSld>
@@ -763,7 +763,7 @@
           <a:p>
             <a:fld id="{6ACDD3C1-6DED-4D92-A071-E0E7C825E60C}" type="datetimeFigureOut">
               <a:rPr lang="zh-CN" altLang="en-US" smtClean="0"/>
-              <a:t>2026/3/17</a:t>
+              <a:t>2026/3/19</a:t>
             </a:fld>
             <a:endParaRPr lang="zh-CN" altLang="en-US"/>
           </a:p>
@@ -814,7 +814,7 @@
     </p:spTree>
     <p:extLst>
       <p:ext uri="{BB962C8B-B14F-4D97-AF65-F5344CB8AC3E}">
-        <p14:creationId xmlns:p14="http://schemas.microsoft.com/office/powerpoint/2010/main" val="47316298"/>
+        <p14:creationId xmlns:p14="http://schemas.microsoft.com/office/powerpoint/2010/main" val="1785278818"/>
       </p:ext>
     </p:extLst>
   </p:cSld>
@@ -853,8 +853,8 @@
         </p:nvSpPr>
         <p:spPr>
           <a:xfrm>
-            <a:off x="442137" y="1525705"/>
-            <a:ext cx="5589151" cy="2545672"/>
+            <a:off x="442137" y="1435864"/>
+            <a:ext cx="5589151" cy="2395771"/>
           </a:xfrm>
         </p:spPr>
         <p:txBody>
@@ -885,8 +885,8 @@
         </p:nvSpPr>
         <p:spPr>
           <a:xfrm>
-            <a:off x="442137" y="4095460"/>
-            <a:ext cx="5589151" cy="1338709"/>
+            <a:off x="442137" y="3854300"/>
+            <a:ext cx="5589151" cy="1259879"/>
           </a:xfrm>
         </p:spPr>
         <p:txBody>
@@ -1007,7 +1007,7 @@
           <a:p>
             <a:fld id="{6ACDD3C1-6DED-4D92-A071-E0E7C825E60C}" type="datetimeFigureOut">
               <a:rPr lang="zh-CN" altLang="en-US" smtClean="0"/>
-              <a:t>2026/3/17</a:t>
+              <a:t>2026/3/19</a:t>
             </a:fld>
             <a:endParaRPr lang="zh-CN" altLang="en-US"/>
           </a:p>
@@ -1058,7 +1058,7 @@
     </p:spTree>
     <p:extLst>
       <p:ext uri="{BB962C8B-B14F-4D97-AF65-F5344CB8AC3E}">
-        <p14:creationId xmlns:p14="http://schemas.microsoft.com/office/powerpoint/2010/main" val="3880357979"/>
+        <p14:creationId xmlns:p14="http://schemas.microsoft.com/office/powerpoint/2010/main" val="2504419936"/>
       </p:ext>
     </p:extLst>
   </p:cSld>
@@ -1120,8 +1120,8 @@
         </p:nvSpPr>
         <p:spPr>
           <a:xfrm>
-            <a:off x="445512" y="1629117"/>
-            <a:ext cx="2754074" cy="3882965"/>
+            <a:off x="445512" y="1533187"/>
+            <a:ext cx="2754074" cy="3654318"/>
           </a:xfrm>
         </p:spPr>
         <p:txBody>
@@ -1177,8 +1177,8 @@
         </p:nvSpPr>
         <p:spPr>
           <a:xfrm>
-            <a:off x="3280589" y="1629117"/>
-            <a:ext cx="2754074" cy="3882965"/>
+            <a:off x="3280589" y="1533187"/>
+            <a:ext cx="2754074" cy="3654318"/>
           </a:xfrm>
         </p:spPr>
         <p:txBody>
@@ -1239,7 +1239,7 @@
           <a:p>
             <a:fld id="{6ACDD3C1-6DED-4D92-A071-E0E7C825E60C}" type="datetimeFigureOut">
               <a:rPr lang="zh-CN" altLang="en-US" smtClean="0"/>
-              <a:t>2026/3/17</a:t>
+              <a:t>2026/3/19</a:t>
             </a:fld>
             <a:endParaRPr lang="zh-CN" altLang="en-US"/>
           </a:p>
@@ -1290,7 +1290,7 @@
     </p:spTree>
     <p:extLst>
       <p:ext uri="{BB962C8B-B14F-4D97-AF65-F5344CB8AC3E}">
-        <p14:creationId xmlns:p14="http://schemas.microsoft.com/office/powerpoint/2010/main" val="1151361223"/>
+        <p14:creationId xmlns:p14="http://schemas.microsoft.com/office/powerpoint/2010/main" val="1861706801"/>
       </p:ext>
     </p:extLst>
   </p:cSld>
@@ -1329,8 +1329,8 @@
         </p:nvSpPr>
         <p:spPr>
           <a:xfrm>
-            <a:off x="446356" y="325825"/>
-            <a:ext cx="5589151" cy="1182881"/>
+            <a:off x="446356" y="306639"/>
+            <a:ext cx="5589151" cy="1113227"/>
           </a:xfrm>
         </p:spPr>
         <p:txBody>
@@ -1357,8 +1357,8 @@
         </p:nvSpPr>
         <p:spPr>
           <a:xfrm>
-            <a:off x="446357" y="1500205"/>
-            <a:ext cx="2741417" cy="735227"/>
+            <a:off x="446357" y="1411865"/>
+            <a:ext cx="2741417" cy="691934"/>
           </a:xfrm>
         </p:spPr>
         <p:txBody>
@@ -1422,8 +1422,8 @@
         </p:nvSpPr>
         <p:spPr>
           <a:xfrm>
-            <a:off x="446357" y="2235432"/>
-            <a:ext cx="2741417" cy="3287983"/>
+            <a:off x="446357" y="2103799"/>
+            <a:ext cx="2741417" cy="3094372"/>
           </a:xfrm>
         </p:spPr>
         <p:txBody>
@@ -1479,8 +1479,8 @@
         </p:nvSpPr>
         <p:spPr>
           <a:xfrm>
-            <a:off x="3280589" y="1500205"/>
-            <a:ext cx="2754918" cy="735227"/>
+            <a:off x="3280589" y="1411865"/>
+            <a:ext cx="2754918" cy="691934"/>
           </a:xfrm>
         </p:spPr>
         <p:txBody>
@@ -1544,8 +1544,8 @@
         </p:nvSpPr>
         <p:spPr>
           <a:xfrm>
-            <a:off x="3280589" y="2235432"/>
-            <a:ext cx="2754918" cy="3287983"/>
+            <a:off x="3280589" y="2103799"/>
+            <a:ext cx="2754918" cy="3094372"/>
           </a:xfrm>
         </p:spPr>
         <p:txBody>
@@ -1606,7 +1606,7 @@
           <a:p>
             <a:fld id="{6ACDD3C1-6DED-4D92-A071-E0E7C825E60C}" type="datetimeFigureOut">
               <a:rPr lang="zh-CN" altLang="en-US" smtClean="0"/>
-              <a:t>2026/3/17</a:t>
+              <a:t>2026/3/19</a:t>
             </a:fld>
             <a:endParaRPr lang="zh-CN" altLang="en-US"/>
           </a:p>
@@ -1657,7 +1657,7 @@
     </p:spTree>
     <p:extLst>
       <p:ext uri="{BB962C8B-B14F-4D97-AF65-F5344CB8AC3E}">
-        <p14:creationId xmlns:p14="http://schemas.microsoft.com/office/powerpoint/2010/main" val="2724929778"/>
+        <p14:creationId xmlns:p14="http://schemas.microsoft.com/office/powerpoint/2010/main" val="2315356116"/>
       </p:ext>
     </p:extLst>
   </p:cSld>
@@ -1724,7 +1724,7 @@
           <a:p>
             <a:fld id="{6ACDD3C1-6DED-4D92-A071-E0E7C825E60C}" type="datetimeFigureOut">
               <a:rPr lang="zh-CN" altLang="en-US" smtClean="0"/>
-              <a:t>2026/3/17</a:t>
+              <a:t>2026/3/19</a:t>
             </a:fld>
             <a:endParaRPr lang="zh-CN" altLang="en-US"/>
           </a:p>
@@ -1775,7 +1775,7 @@
     </p:spTree>
     <p:extLst>
       <p:ext uri="{BB962C8B-B14F-4D97-AF65-F5344CB8AC3E}">
-        <p14:creationId xmlns:p14="http://schemas.microsoft.com/office/powerpoint/2010/main" val="4039181973"/>
+        <p14:creationId xmlns:p14="http://schemas.microsoft.com/office/powerpoint/2010/main" val="2593258227"/>
       </p:ext>
     </p:extLst>
   </p:cSld>
@@ -1819,7 +1819,7 @@
           <a:p>
             <a:fld id="{6ACDD3C1-6DED-4D92-A071-E0E7C825E60C}" type="datetimeFigureOut">
               <a:rPr lang="zh-CN" altLang="en-US" smtClean="0"/>
-              <a:t>2026/3/17</a:t>
+              <a:t>2026/3/19</a:t>
             </a:fld>
             <a:endParaRPr lang="zh-CN" altLang="en-US"/>
           </a:p>
@@ -1870,7 +1870,7 @@
     </p:spTree>
     <p:extLst>
       <p:ext uri="{BB962C8B-B14F-4D97-AF65-F5344CB8AC3E}">
-        <p14:creationId xmlns:p14="http://schemas.microsoft.com/office/powerpoint/2010/main" val="1518800919"/>
+        <p14:creationId xmlns:p14="http://schemas.microsoft.com/office/powerpoint/2010/main" val="1891150614"/>
       </p:ext>
     </p:extLst>
   </p:cSld>
@@ -1909,8 +1909,8 @@
         </p:nvSpPr>
         <p:spPr>
           <a:xfrm>
-            <a:off x="446356" y="407988"/>
-            <a:ext cx="2090025" cy="1427956"/>
+            <a:off x="446356" y="383963"/>
+            <a:ext cx="2090025" cy="1343872"/>
           </a:xfrm>
         </p:spPr>
         <p:txBody>
@@ -1941,8 +1941,8 @@
         </p:nvSpPr>
         <p:spPr>
           <a:xfrm>
-            <a:off x="2754918" y="881141"/>
-            <a:ext cx="3280589" cy="4349034"/>
+            <a:off x="2754918" y="829256"/>
+            <a:ext cx="3280589" cy="4092942"/>
           </a:xfrm>
         </p:spPr>
         <p:txBody>
@@ -2026,8 +2026,8 @@
         </p:nvSpPr>
         <p:spPr>
           <a:xfrm>
-            <a:off x="446356" y="1835944"/>
-            <a:ext cx="2090025" cy="3401313"/>
+            <a:off x="446356" y="1727835"/>
+            <a:ext cx="2090025" cy="3201028"/>
           </a:xfrm>
         </p:spPr>
         <p:txBody>
@@ -2096,7 +2096,7 @@
           <a:p>
             <a:fld id="{6ACDD3C1-6DED-4D92-A071-E0E7C825E60C}" type="datetimeFigureOut">
               <a:rPr lang="zh-CN" altLang="en-US" smtClean="0"/>
-              <a:t>2026/3/17</a:t>
+              <a:t>2026/3/19</a:t>
             </a:fld>
             <a:endParaRPr lang="zh-CN" altLang="en-US"/>
           </a:p>
@@ -2147,7 +2147,7 @@
     </p:spTree>
     <p:extLst>
       <p:ext uri="{BB962C8B-B14F-4D97-AF65-F5344CB8AC3E}">
-        <p14:creationId xmlns:p14="http://schemas.microsoft.com/office/powerpoint/2010/main" val="3840897431"/>
+        <p14:creationId xmlns:p14="http://schemas.microsoft.com/office/powerpoint/2010/main" val="629859852"/>
       </p:ext>
     </p:extLst>
   </p:cSld>
@@ -2186,8 +2186,8 @@
         </p:nvSpPr>
         <p:spPr>
           <a:xfrm>
-            <a:off x="446356" y="407988"/>
-            <a:ext cx="2090025" cy="1427956"/>
+            <a:off x="446356" y="383963"/>
+            <a:ext cx="2090025" cy="1343872"/>
           </a:xfrm>
         </p:spPr>
         <p:txBody>
@@ -2218,8 +2218,8 @@
         </p:nvSpPr>
         <p:spPr>
           <a:xfrm>
-            <a:off x="2754918" y="881141"/>
-            <a:ext cx="3280589" cy="4349034"/>
+            <a:off x="2754918" y="829256"/>
+            <a:ext cx="3280589" cy="4092942"/>
           </a:xfrm>
         </p:spPr>
         <p:txBody>
@@ -2283,8 +2283,8 @@
         </p:nvSpPr>
         <p:spPr>
           <a:xfrm>
-            <a:off x="446356" y="1835944"/>
-            <a:ext cx="2090025" cy="3401313"/>
+            <a:off x="446356" y="1727835"/>
+            <a:ext cx="2090025" cy="3201028"/>
           </a:xfrm>
         </p:spPr>
         <p:txBody>
@@ -2353,7 +2353,7 @@
           <a:p>
             <a:fld id="{6ACDD3C1-6DED-4D92-A071-E0E7C825E60C}" type="datetimeFigureOut">
               <a:rPr lang="zh-CN" altLang="en-US" smtClean="0"/>
-              <a:t>2026/3/17</a:t>
+              <a:t>2026/3/19</a:t>
             </a:fld>
             <a:endParaRPr lang="zh-CN" altLang="en-US"/>
           </a:p>
@@ -2404,7 +2404,7 @@
     </p:spTree>
     <p:extLst>
       <p:ext uri="{BB962C8B-B14F-4D97-AF65-F5344CB8AC3E}">
-        <p14:creationId xmlns:p14="http://schemas.microsoft.com/office/powerpoint/2010/main" val="675960468"/>
+        <p14:creationId xmlns:p14="http://schemas.microsoft.com/office/powerpoint/2010/main" val="3166237112"/>
       </p:ext>
     </p:extLst>
   </p:cSld>
@@ -2448,8 +2448,8 @@
         </p:nvSpPr>
         <p:spPr>
           <a:xfrm>
-            <a:off x="445512" y="325825"/>
-            <a:ext cx="5589151" cy="1182881"/>
+            <a:off x="445512" y="306639"/>
+            <a:ext cx="5589151" cy="1113227"/>
           </a:xfrm>
           <a:prstGeom prst="rect">
             <a:avLst/>
@@ -2481,8 +2481,8 @@
         </p:nvSpPr>
         <p:spPr>
           <a:xfrm>
-            <a:off x="445512" y="1629117"/>
-            <a:ext cx="5589151" cy="3882965"/>
+            <a:off x="445512" y="1533187"/>
+            <a:ext cx="5589151" cy="3654318"/>
           </a:xfrm>
           <a:prstGeom prst="rect">
             <a:avLst/>
@@ -2543,8 +2543,8 @@
         </p:nvSpPr>
         <p:spPr>
           <a:xfrm>
-            <a:off x="445512" y="5672162"/>
-            <a:ext cx="1458039" cy="325823"/>
+            <a:off x="445512" y="5338158"/>
+            <a:ext cx="1458039" cy="306637"/>
           </a:xfrm>
           <a:prstGeom prst="rect">
             <a:avLst/>
@@ -2566,7 +2566,7 @@
           <a:p>
             <a:fld id="{6ACDD3C1-6DED-4D92-A071-E0E7C825E60C}" type="datetimeFigureOut">
               <a:rPr lang="zh-CN" altLang="en-US" smtClean="0"/>
-              <a:t>2026/3/17</a:t>
+              <a:t>2026/3/19</a:t>
             </a:fld>
             <a:endParaRPr lang="zh-CN" altLang="en-US"/>
           </a:p>
@@ -2584,8 +2584,8 @@
         </p:nvSpPr>
         <p:spPr>
           <a:xfrm>
-            <a:off x="2146558" y="5672162"/>
-            <a:ext cx="2187059" cy="325823"/>
+            <a:off x="2146558" y="5338158"/>
+            <a:ext cx="2187059" cy="306637"/>
           </a:xfrm>
           <a:prstGeom prst="rect">
             <a:avLst/>
@@ -2621,8 +2621,8 @@
         </p:nvSpPr>
         <p:spPr>
           <a:xfrm>
-            <a:off x="4576624" y="5672162"/>
-            <a:ext cx="1458039" cy="325823"/>
+            <a:off x="4576624" y="5338158"/>
+            <a:ext cx="1458039" cy="306637"/>
           </a:xfrm>
           <a:prstGeom prst="rect">
             <a:avLst/>
@@ -2653,23 +2653,23 @@
     </p:spTree>
     <p:extLst>
       <p:ext uri="{BB962C8B-B14F-4D97-AF65-F5344CB8AC3E}">
-        <p14:creationId xmlns:p14="http://schemas.microsoft.com/office/powerpoint/2010/main" val="2053734260"/>
+        <p14:creationId xmlns:p14="http://schemas.microsoft.com/office/powerpoint/2010/main" val="3533534640"/>
       </p:ext>
     </p:extLst>
   </p:cSld>
   <p:clrMap bg1="lt1" tx1="dk1" bg2="lt2" tx2="dk2" accent1="accent1" accent2="accent2" accent3="accent3" accent4="accent4" accent5="accent5" accent6="accent6" hlink="hlink" folHlink="folHlink"/>
   <p:sldLayoutIdLst>
-    <p:sldLayoutId id="2147483661" r:id="rId1"/>
-    <p:sldLayoutId id="2147483662" r:id="rId2"/>
-    <p:sldLayoutId id="2147483663" r:id="rId3"/>
-    <p:sldLayoutId id="2147483664" r:id="rId4"/>
-    <p:sldLayoutId id="2147483665" r:id="rId5"/>
-    <p:sldLayoutId id="2147483666" r:id="rId6"/>
-    <p:sldLayoutId id="2147483667" r:id="rId7"/>
-    <p:sldLayoutId id="2147483668" r:id="rId8"/>
-    <p:sldLayoutId id="2147483669" r:id="rId9"/>
-    <p:sldLayoutId id="2147483670" r:id="rId10"/>
-    <p:sldLayoutId id="2147483671" r:id="rId11"/>
+    <p:sldLayoutId id="2147483673" r:id="rId1"/>
+    <p:sldLayoutId id="2147483674" r:id="rId2"/>
+    <p:sldLayoutId id="2147483675" r:id="rId3"/>
+    <p:sldLayoutId id="2147483676" r:id="rId4"/>
+    <p:sldLayoutId id="2147483677" r:id="rId5"/>
+    <p:sldLayoutId id="2147483678" r:id="rId6"/>
+    <p:sldLayoutId id="2147483679" r:id="rId7"/>
+    <p:sldLayoutId id="2147483680" r:id="rId8"/>
+    <p:sldLayoutId id="2147483681" r:id="rId9"/>
+    <p:sldLayoutId id="2147483682" r:id="rId10"/>
+    <p:sldLayoutId id="2147483683" r:id="rId11"/>
   </p:sldLayoutIdLst>
   <p:txStyles>
     <p:titleStyle>
@@ -2971,1085 +2971,12 @@
           <a:chExt cx="0" cy="0"/>
         </a:xfrm>
       </p:grpSpPr>
-      <p:sp>
-        <p:nvSpPr>
-          <p:cNvPr id="8" name="矩形 7">
+      <p:grpSp>
+        <p:nvGrpSpPr>
+          <p:cNvPr id="2" name="组合 1">
             <a:extLst>
               <a:ext uri="{FF2B5EF4-FFF2-40B4-BE49-F238E27FC236}">
-                <a16:creationId xmlns:a16="http://schemas.microsoft.com/office/drawing/2014/main" id="{6967133F-3188-49BA-89E1-C647CD2762DA}"/>
-              </a:ext>
-            </a:extLst>
-          </p:cNvPr>
-          <p:cNvSpPr/>
-          <p:nvPr/>
-        </p:nvSpPr>
-        <p:spPr>
-          <a:xfrm>
-            <a:off x="39985" y="11113"/>
-            <a:ext cx="6419850" cy="6108700"/>
-          </a:xfrm>
-          <a:prstGeom prst="rect">
-            <a:avLst/>
-          </a:prstGeom>
-          <a:noFill/>
-          <a:ln>
-            <a:solidFill>
-              <a:schemeClr val="tx1"/>
-            </a:solidFill>
-          </a:ln>
-        </p:spPr>
-        <p:style>
-          <a:lnRef idx="2">
-            <a:schemeClr val="accent1">
-              <a:shade val="50000"/>
-            </a:schemeClr>
-          </a:lnRef>
-          <a:fillRef idx="1">
-            <a:schemeClr val="accent1"/>
-          </a:fillRef>
-          <a:effectRef idx="0">
-            <a:schemeClr val="accent1"/>
-          </a:effectRef>
-          <a:fontRef idx="minor">
-            <a:schemeClr val="lt1"/>
-          </a:fontRef>
-        </p:style>
-        <p:txBody>
-          <a:bodyPr rtlCol="0" anchor="ctr"/>
-          <a:lstStyle/>
-          <a:p>
-            <a:pPr algn="ctr"/>
-            <a:endParaRPr lang="zh-CN" altLang="en-US"/>
-          </a:p>
-        </p:txBody>
-      </p:sp>
-      <p:sp>
-        <p:nvSpPr>
-          <p:cNvPr id="9" name="矩形 8">
-            <a:extLst>
-              <a:ext uri="{FF2B5EF4-FFF2-40B4-BE49-F238E27FC236}">
-                <a16:creationId xmlns:a16="http://schemas.microsoft.com/office/drawing/2014/main" id="{9A46188A-82FB-4055-AB2A-E1F75ECEA918}"/>
-              </a:ext>
-            </a:extLst>
-          </p:cNvPr>
-          <p:cNvSpPr/>
-          <p:nvPr/>
-        </p:nvSpPr>
-        <p:spPr>
-          <a:xfrm>
-            <a:off x="195560" y="385762"/>
-            <a:ext cx="6108700" cy="1494225"/>
-          </a:xfrm>
-          <a:prstGeom prst="rect">
-            <a:avLst/>
-          </a:prstGeom>
-          <a:solidFill>
-            <a:srgbClr val="E7ECEC"/>
-          </a:solidFill>
-          <a:ln>
-            <a:noFill/>
-          </a:ln>
-        </p:spPr>
-        <p:style>
-          <a:lnRef idx="2">
-            <a:schemeClr val="accent1">
-              <a:shade val="50000"/>
-            </a:schemeClr>
-          </a:lnRef>
-          <a:fillRef idx="1">
-            <a:schemeClr val="accent1"/>
-          </a:fillRef>
-          <a:effectRef idx="0">
-            <a:schemeClr val="accent1"/>
-          </a:effectRef>
-          <a:fontRef idx="minor">
-            <a:schemeClr val="lt1"/>
-          </a:fontRef>
-        </p:style>
-        <p:txBody>
-          <a:bodyPr rtlCol="0" anchor="ctr"/>
-          <a:lstStyle/>
-          <a:p>
-            <a:pPr algn="ctr"/>
-            <a:endParaRPr lang="zh-CN" altLang="en-US" dirty="0"/>
-          </a:p>
-        </p:txBody>
-      </p:sp>
-      <p:sp>
-        <p:nvSpPr>
-          <p:cNvPr id="10" name="文本框 9">
-            <a:extLst>
-              <a:ext uri="{FF2B5EF4-FFF2-40B4-BE49-F238E27FC236}">
-                <a16:creationId xmlns:a16="http://schemas.microsoft.com/office/drawing/2014/main" id="{00832735-D44B-4DEA-BF6C-351F71D7D9DD}"/>
-              </a:ext>
-            </a:extLst>
-          </p:cNvPr>
-          <p:cNvSpPr txBox="1"/>
-          <p:nvPr/>
-        </p:nvSpPr>
-        <p:spPr>
-          <a:xfrm>
-            <a:off x="195560" y="596513"/>
-            <a:ext cx="954107" cy="276999"/>
-          </a:xfrm>
-          <a:prstGeom prst="rect">
-            <a:avLst/>
-          </a:prstGeom>
-          <a:noFill/>
-        </p:spPr>
-        <p:txBody>
-          <a:bodyPr wrap="none" rtlCol="0">
-            <a:spAutoFit/>
-          </a:bodyPr>
-          <a:lstStyle/>
-          <a:p>
-            <a:r>
-              <a:rPr lang="zh-CN" altLang="en-US" sz="1200" dirty="0">
-                <a:latin typeface="宋体" panose="02010600030101010101" pitchFamily="2" charset="-122"/>
-                <a:ea typeface="宋体" panose="02010600030101010101" pitchFamily="2" charset="-122"/>
-              </a:rPr>
-              <a:t>应用表现层</a:t>
-            </a:r>
-          </a:p>
-        </p:txBody>
-      </p:sp>
-      <p:sp>
-        <p:nvSpPr>
-          <p:cNvPr id="12" name="矩形 11">
-            <a:extLst>
-              <a:ext uri="{FF2B5EF4-FFF2-40B4-BE49-F238E27FC236}">
-                <a16:creationId xmlns:a16="http://schemas.microsoft.com/office/drawing/2014/main" id="{F2471AF0-0390-4509-AF18-5BF2D5F58552}"/>
-              </a:ext>
-            </a:extLst>
-          </p:cNvPr>
-          <p:cNvSpPr/>
-          <p:nvPr/>
-        </p:nvSpPr>
-        <p:spPr>
-          <a:xfrm>
-            <a:off x="1305242" y="587762"/>
-            <a:ext cx="707009" cy="285750"/>
-          </a:xfrm>
-          <a:prstGeom prst="rect">
-            <a:avLst/>
-          </a:prstGeom>
-          <a:noFill/>
-          <a:ln>
-            <a:solidFill>
-              <a:schemeClr val="tx1"/>
-            </a:solidFill>
-          </a:ln>
-        </p:spPr>
-        <p:style>
-          <a:lnRef idx="2">
-            <a:schemeClr val="accent1">
-              <a:shade val="50000"/>
-            </a:schemeClr>
-          </a:lnRef>
-          <a:fillRef idx="1">
-            <a:schemeClr val="accent1"/>
-          </a:fillRef>
-          <a:effectRef idx="0">
-            <a:schemeClr val="accent1"/>
-          </a:effectRef>
-          <a:fontRef idx="minor">
-            <a:schemeClr val="lt1"/>
-          </a:fontRef>
-        </p:style>
-        <p:txBody>
-          <a:bodyPr rtlCol="0" anchor="ctr"/>
-          <a:lstStyle/>
-          <a:p>
-            <a:pPr algn="ctr"/>
-            <a:r>
-              <a:rPr lang="en-US" altLang="zh-CN" sz="1200" dirty="0">
-                <a:solidFill>
-                  <a:schemeClr val="tx1"/>
-                </a:solidFill>
-                <a:latin typeface="宋体" panose="02010600030101010101" pitchFamily="2" charset="-122"/>
-                <a:ea typeface="宋体" panose="02010600030101010101" pitchFamily="2" charset="-122"/>
-              </a:rPr>
-              <a:t>Html</a:t>
-            </a:r>
-            <a:endParaRPr lang="zh-CN" altLang="en-US" sz="1200" dirty="0">
-              <a:solidFill>
-                <a:schemeClr val="tx1"/>
-              </a:solidFill>
-              <a:latin typeface="宋体" panose="02010600030101010101" pitchFamily="2" charset="-122"/>
-              <a:ea typeface="宋体" panose="02010600030101010101" pitchFamily="2" charset="-122"/>
-            </a:endParaRPr>
-          </a:p>
-        </p:txBody>
-      </p:sp>
-      <p:sp>
-        <p:nvSpPr>
-          <p:cNvPr id="13" name="矩形 12">
-            <a:extLst>
-              <a:ext uri="{FF2B5EF4-FFF2-40B4-BE49-F238E27FC236}">
-                <a16:creationId xmlns:a16="http://schemas.microsoft.com/office/drawing/2014/main" id="{21813305-6516-4878-9AC2-9C8E5D80719B}"/>
-              </a:ext>
-            </a:extLst>
-          </p:cNvPr>
-          <p:cNvSpPr/>
-          <p:nvPr/>
-        </p:nvSpPr>
-        <p:spPr>
-          <a:xfrm>
-            <a:off x="2339819" y="587762"/>
-            <a:ext cx="707009" cy="285750"/>
-          </a:xfrm>
-          <a:prstGeom prst="rect">
-            <a:avLst/>
-          </a:prstGeom>
-          <a:noFill/>
-          <a:ln>
-            <a:solidFill>
-              <a:schemeClr val="tx1"/>
-            </a:solidFill>
-          </a:ln>
-        </p:spPr>
-        <p:style>
-          <a:lnRef idx="2">
-            <a:schemeClr val="accent1">
-              <a:shade val="50000"/>
-            </a:schemeClr>
-          </a:lnRef>
-          <a:fillRef idx="1">
-            <a:schemeClr val="accent1"/>
-          </a:fillRef>
-          <a:effectRef idx="0">
-            <a:schemeClr val="accent1"/>
-          </a:effectRef>
-          <a:fontRef idx="minor">
-            <a:schemeClr val="lt1"/>
-          </a:fontRef>
-        </p:style>
-        <p:txBody>
-          <a:bodyPr rtlCol="0" anchor="ctr"/>
-          <a:lstStyle/>
-          <a:p>
-            <a:pPr algn="ctr"/>
-            <a:r>
-              <a:rPr lang="en-US" altLang="zh-CN" sz="1200" dirty="0">
-                <a:solidFill>
-                  <a:schemeClr val="tx1"/>
-                </a:solidFill>
-                <a:latin typeface="宋体" panose="02010600030101010101" pitchFamily="2" charset="-122"/>
-                <a:ea typeface="宋体" panose="02010600030101010101" pitchFamily="2" charset="-122"/>
-              </a:rPr>
-              <a:t>CSS</a:t>
-            </a:r>
-            <a:endParaRPr lang="zh-CN" altLang="en-US" sz="1200" dirty="0">
-              <a:solidFill>
-                <a:schemeClr val="tx1"/>
-              </a:solidFill>
-              <a:latin typeface="宋体" panose="02010600030101010101" pitchFamily="2" charset="-122"/>
-              <a:ea typeface="宋体" panose="02010600030101010101" pitchFamily="2" charset="-122"/>
-            </a:endParaRPr>
-          </a:p>
-        </p:txBody>
-      </p:sp>
-      <p:sp>
-        <p:nvSpPr>
-          <p:cNvPr id="14" name="矩形 13">
-            <a:extLst>
-              <a:ext uri="{FF2B5EF4-FFF2-40B4-BE49-F238E27FC236}">
-                <a16:creationId xmlns:a16="http://schemas.microsoft.com/office/drawing/2014/main" id="{389E6F0F-7918-463B-9752-3A27DB783BE8}"/>
-              </a:ext>
-            </a:extLst>
-          </p:cNvPr>
-          <p:cNvSpPr/>
-          <p:nvPr/>
-        </p:nvSpPr>
-        <p:spPr>
-          <a:xfrm>
-            <a:off x="3374396" y="596513"/>
-            <a:ext cx="707009" cy="285750"/>
-          </a:xfrm>
-          <a:prstGeom prst="rect">
-            <a:avLst/>
-          </a:prstGeom>
-          <a:noFill/>
-          <a:ln>
-            <a:solidFill>
-              <a:schemeClr val="tx1"/>
-            </a:solidFill>
-          </a:ln>
-        </p:spPr>
-        <p:style>
-          <a:lnRef idx="2">
-            <a:schemeClr val="accent1">
-              <a:shade val="50000"/>
-            </a:schemeClr>
-          </a:lnRef>
-          <a:fillRef idx="1">
-            <a:schemeClr val="accent1"/>
-          </a:fillRef>
-          <a:effectRef idx="0">
-            <a:schemeClr val="accent1"/>
-          </a:effectRef>
-          <a:fontRef idx="minor">
-            <a:schemeClr val="lt1"/>
-          </a:fontRef>
-        </p:style>
-        <p:txBody>
-          <a:bodyPr rtlCol="0" anchor="ctr"/>
-          <a:lstStyle/>
-          <a:p>
-            <a:pPr algn="ctr"/>
-            <a:r>
-              <a:rPr lang="en-US" altLang="zh-CN" sz="1200" dirty="0">
-                <a:solidFill>
-                  <a:schemeClr val="tx1"/>
-                </a:solidFill>
-                <a:latin typeface="宋体" panose="02010600030101010101" pitchFamily="2" charset="-122"/>
-                <a:ea typeface="宋体" panose="02010600030101010101" pitchFamily="2" charset="-122"/>
-              </a:rPr>
-              <a:t>Vue</a:t>
-            </a:r>
-            <a:endParaRPr lang="zh-CN" altLang="en-US" sz="1200" dirty="0">
-              <a:solidFill>
-                <a:schemeClr val="tx1"/>
-              </a:solidFill>
-              <a:latin typeface="宋体" panose="02010600030101010101" pitchFamily="2" charset="-122"/>
-              <a:ea typeface="宋体" panose="02010600030101010101" pitchFamily="2" charset="-122"/>
-            </a:endParaRPr>
-          </a:p>
-        </p:txBody>
-      </p:sp>
-      <p:sp>
-        <p:nvSpPr>
-          <p:cNvPr id="16" name="矩形 15">
-            <a:extLst>
-              <a:ext uri="{FF2B5EF4-FFF2-40B4-BE49-F238E27FC236}">
-                <a16:creationId xmlns:a16="http://schemas.microsoft.com/office/drawing/2014/main" id="{8F94AB9A-0FCB-4020-860F-945140401C7C}"/>
-              </a:ext>
-            </a:extLst>
-          </p:cNvPr>
-          <p:cNvSpPr/>
-          <p:nvPr/>
-        </p:nvSpPr>
-        <p:spPr>
-          <a:xfrm>
-            <a:off x="4408973" y="587762"/>
-            <a:ext cx="782114" cy="285750"/>
-          </a:xfrm>
-          <a:prstGeom prst="rect">
-            <a:avLst/>
-          </a:prstGeom>
-          <a:noFill/>
-          <a:ln>
-            <a:solidFill>
-              <a:schemeClr val="tx1"/>
-            </a:solidFill>
-          </a:ln>
-        </p:spPr>
-        <p:style>
-          <a:lnRef idx="2">
-            <a:schemeClr val="accent1">
-              <a:shade val="50000"/>
-            </a:schemeClr>
-          </a:lnRef>
-          <a:fillRef idx="1">
-            <a:schemeClr val="accent1"/>
-          </a:fillRef>
-          <a:effectRef idx="0">
-            <a:schemeClr val="accent1"/>
-          </a:effectRef>
-          <a:fontRef idx="minor">
-            <a:schemeClr val="lt1"/>
-          </a:fontRef>
-        </p:style>
-        <p:txBody>
-          <a:bodyPr rtlCol="0" anchor="ctr"/>
-          <a:lstStyle/>
-          <a:p>
-            <a:pPr algn="ctr"/>
-            <a:r>
-              <a:rPr lang="en-US" altLang="zh-CN" sz="1200" dirty="0">
-                <a:solidFill>
-                  <a:schemeClr val="tx1"/>
-                </a:solidFill>
-                <a:latin typeface="宋体" panose="02010600030101010101" pitchFamily="2" charset="-122"/>
-                <a:ea typeface="宋体" panose="02010600030101010101" pitchFamily="2" charset="-122"/>
-              </a:rPr>
-              <a:t>ECharts</a:t>
-            </a:r>
-            <a:endParaRPr lang="zh-CN" altLang="en-US" sz="1200" dirty="0">
-              <a:solidFill>
-                <a:schemeClr val="tx1"/>
-              </a:solidFill>
-              <a:latin typeface="宋体" panose="02010600030101010101" pitchFamily="2" charset="-122"/>
-              <a:ea typeface="宋体" panose="02010600030101010101" pitchFamily="2" charset="-122"/>
-            </a:endParaRPr>
-          </a:p>
-        </p:txBody>
-      </p:sp>
-      <p:sp>
-        <p:nvSpPr>
-          <p:cNvPr id="17" name="矩形 16">
-            <a:extLst>
-              <a:ext uri="{FF2B5EF4-FFF2-40B4-BE49-F238E27FC236}">
-                <a16:creationId xmlns:a16="http://schemas.microsoft.com/office/drawing/2014/main" id="{8E098161-C08C-41FB-B812-C25159C0BCBF}"/>
-              </a:ext>
-            </a:extLst>
-          </p:cNvPr>
-          <p:cNvSpPr/>
-          <p:nvPr/>
-        </p:nvSpPr>
-        <p:spPr>
-          <a:xfrm>
-            <a:off x="1358599" y="1451188"/>
-            <a:ext cx="1108007" cy="290322"/>
-          </a:xfrm>
-          <a:prstGeom prst="rect">
-            <a:avLst/>
-          </a:prstGeom>
-          <a:noFill/>
-          <a:ln>
-            <a:solidFill>
-              <a:schemeClr val="tx1"/>
-            </a:solidFill>
-          </a:ln>
-        </p:spPr>
-        <p:style>
-          <a:lnRef idx="2">
-            <a:schemeClr val="accent1">
-              <a:shade val="50000"/>
-            </a:schemeClr>
-          </a:lnRef>
-          <a:fillRef idx="1">
-            <a:schemeClr val="accent1"/>
-          </a:fillRef>
-          <a:effectRef idx="0">
-            <a:schemeClr val="accent1"/>
-          </a:effectRef>
-          <a:fontRef idx="minor">
-            <a:schemeClr val="lt1"/>
-          </a:fontRef>
-        </p:style>
-        <p:txBody>
-          <a:bodyPr rtlCol="0" anchor="ctr"/>
-          <a:lstStyle/>
-          <a:p>
-            <a:pPr algn="ctr"/>
-            <a:r>
-              <a:rPr lang="zh-CN" altLang="en-US" sz="1200" dirty="0">
-                <a:solidFill>
-                  <a:schemeClr val="tx1"/>
-                </a:solidFill>
-                <a:latin typeface="宋体" panose="02010600030101010101" pitchFamily="2" charset="-122"/>
-                <a:ea typeface="宋体" panose="02010600030101010101" pitchFamily="2" charset="-122"/>
-              </a:rPr>
-              <a:t>模板引擎渲染</a:t>
-            </a:r>
-          </a:p>
-        </p:txBody>
-      </p:sp>
-      <p:sp>
-        <p:nvSpPr>
-          <p:cNvPr id="15" name="矩形 14">
-            <a:extLst>
-              <a:ext uri="{FF2B5EF4-FFF2-40B4-BE49-F238E27FC236}">
-                <a16:creationId xmlns:a16="http://schemas.microsoft.com/office/drawing/2014/main" id="{F2BFBB7C-0320-4436-81AA-15D42E34EEA9}"/>
-              </a:ext>
-            </a:extLst>
-          </p:cNvPr>
-          <p:cNvSpPr/>
-          <p:nvPr/>
-        </p:nvSpPr>
-        <p:spPr>
-          <a:xfrm>
-            <a:off x="3762766" y="1451188"/>
-            <a:ext cx="800219" cy="285750"/>
-          </a:xfrm>
-          <a:prstGeom prst="rect">
-            <a:avLst/>
-          </a:prstGeom>
-          <a:noFill/>
-          <a:ln>
-            <a:solidFill>
-              <a:schemeClr val="tx1"/>
-            </a:solidFill>
-          </a:ln>
-        </p:spPr>
-        <p:style>
-          <a:lnRef idx="2">
-            <a:schemeClr val="accent1">
-              <a:shade val="50000"/>
-            </a:schemeClr>
-          </a:lnRef>
-          <a:fillRef idx="1">
-            <a:schemeClr val="accent1"/>
-          </a:fillRef>
-          <a:effectRef idx="0">
-            <a:schemeClr val="accent1"/>
-          </a:effectRef>
-          <a:fontRef idx="minor">
-            <a:schemeClr val="lt1"/>
-          </a:fontRef>
-        </p:style>
-        <p:txBody>
-          <a:bodyPr rtlCol="0" anchor="ctr"/>
-          <a:lstStyle/>
-          <a:p>
-            <a:pPr algn="ctr"/>
-            <a:r>
-              <a:rPr lang="en-US" altLang="zh-CN" sz="1200" dirty="0">
-                <a:solidFill>
-                  <a:schemeClr val="tx1"/>
-                </a:solidFill>
-                <a:latin typeface="宋体" panose="02010600030101010101" pitchFamily="2" charset="-122"/>
-                <a:ea typeface="宋体" panose="02010600030101010101" pitchFamily="2" charset="-122"/>
-              </a:rPr>
-              <a:t>Post</a:t>
-            </a:r>
-            <a:r>
-              <a:rPr lang="zh-CN" altLang="en-US" sz="1200" dirty="0">
-                <a:solidFill>
-                  <a:schemeClr val="tx1"/>
-                </a:solidFill>
-                <a:latin typeface="宋体" panose="02010600030101010101" pitchFamily="2" charset="-122"/>
-                <a:ea typeface="宋体" panose="02010600030101010101" pitchFamily="2" charset="-122"/>
-              </a:rPr>
-              <a:t>请求</a:t>
-            </a:r>
-          </a:p>
-        </p:txBody>
-      </p:sp>
-      <p:sp>
-        <p:nvSpPr>
-          <p:cNvPr id="20" name="矩形 19">
-            <a:extLst>
-              <a:ext uri="{FF2B5EF4-FFF2-40B4-BE49-F238E27FC236}">
-                <a16:creationId xmlns:a16="http://schemas.microsoft.com/office/drawing/2014/main" id="{FFB5E642-1844-45E7-94F8-2D4570330B75}"/>
-              </a:ext>
-            </a:extLst>
-          </p:cNvPr>
-          <p:cNvSpPr/>
-          <p:nvPr/>
-        </p:nvSpPr>
-        <p:spPr>
-          <a:xfrm>
-            <a:off x="4890784" y="1451188"/>
-            <a:ext cx="800219" cy="285750"/>
-          </a:xfrm>
-          <a:prstGeom prst="rect">
-            <a:avLst/>
-          </a:prstGeom>
-          <a:noFill/>
-          <a:ln>
-            <a:solidFill>
-              <a:schemeClr val="tx1"/>
-            </a:solidFill>
-          </a:ln>
-        </p:spPr>
-        <p:style>
-          <a:lnRef idx="2">
-            <a:schemeClr val="accent1">
-              <a:shade val="50000"/>
-            </a:schemeClr>
-          </a:lnRef>
-          <a:fillRef idx="1">
-            <a:schemeClr val="accent1"/>
-          </a:fillRef>
-          <a:effectRef idx="0">
-            <a:schemeClr val="accent1"/>
-          </a:effectRef>
-          <a:fontRef idx="minor">
-            <a:schemeClr val="lt1"/>
-          </a:fontRef>
-        </p:style>
-        <p:txBody>
-          <a:bodyPr rtlCol="0" anchor="ctr"/>
-          <a:lstStyle/>
-          <a:p>
-            <a:pPr algn="ctr"/>
-            <a:r>
-              <a:rPr lang="en-US" altLang="zh-CN" sz="1200" dirty="0">
-                <a:solidFill>
-                  <a:schemeClr val="tx1"/>
-                </a:solidFill>
-                <a:latin typeface="宋体" panose="02010600030101010101" pitchFamily="2" charset="-122"/>
-                <a:ea typeface="宋体" panose="02010600030101010101" pitchFamily="2" charset="-122"/>
-              </a:rPr>
-              <a:t>Get</a:t>
-            </a:r>
-            <a:r>
-              <a:rPr lang="zh-CN" altLang="en-US" sz="1200" dirty="0">
-                <a:solidFill>
-                  <a:schemeClr val="tx1"/>
-                </a:solidFill>
-                <a:latin typeface="宋体" panose="02010600030101010101" pitchFamily="2" charset="-122"/>
-                <a:ea typeface="宋体" panose="02010600030101010101" pitchFamily="2" charset="-122"/>
-              </a:rPr>
-              <a:t>请求</a:t>
-            </a:r>
-          </a:p>
-        </p:txBody>
-      </p:sp>
-      <p:sp>
-        <p:nvSpPr>
-          <p:cNvPr id="24" name="矩形 23">
-            <a:extLst>
-              <a:ext uri="{FF2B5EF4-FFF2-40B4-BE49-F238E27FC236}">
-                <a16:creationId xmlns:a16="http://schemas.microsoft.com/office/drawing/2014/main" id="{6E2ABF2F-8E8F-4269-90AC-2DAFBB44A437}"/>
-              </a:ext>
-            </a:extLst>
-          </p:cNvPr>
-          <p:cNvSpPr/>
-          <p:nvPr/>
-        </p:nvSpPr>
-        <p:spPr>
-          <a:xfrm>
-            <a:off x="195559" y="2166163"/>
-            <a:ext cx="5133976" cy="1112293"/>
-          </a:xfrm>
-          <a:prstGeom prst="rect">
-            <a:avLst/>
-          </a:prstGeom>
-          <a:solidFill>
-            <a:srgbClr val="D8F5F5"/>
-          </a:solidFill>
-          <a:ln>
-            <a:noFill/>
-          </a:ln>
-        </p:spPr>
-        <p:style>
-          <a:lnRef idx="2">
-            <a:schemeClr val="accent1">
-              <a:shade val="50000"/>
-            </a:schemeClr>
-          </a:lnRef>
-          <a:fillRef idx="1">
-            <a:schemeClr val="accent1"/>
-          </a:fillRef>
-          <a:effectRef idx="0">
-            <a:schemeClr val="accent1"/>
-          </a:effectRef>
-          <a:fontRef idx="minor">
-            <a:schemeClr val="lt1"/>
-          </a:fontRef>
-        </p:style>
-        <p:txBody>
-          <a:bodyPr rtlCol="0" anchor="ctr"/>
-          <a:lstStyle/>
-          <a:p>
-            <a:pPr algn="ctr"/>
-            <a:endParaRPr lang="zh-CN" altLang="en-US" dirty="0"/>
-          </a:p>
-        </p:txBody>
-      </p:sp>
-      <p:sp>
-        <p:nvSpPr>
-          <p:cNvPr id="26" name="文本框 25">
-            <a:extLst>
-              <a:ext uri="{FF2B5EF4-FFF2-40B4-BE49-F238E27FC236}">
-                <a16:creationId xmlns:a16="http://schemas.microsoft.com/office/drawing/2014/main" id="{6FF3AAF6-8B07-4ABB-8440-D04BE301D88B}"/>
-              </a:ext>
-            </a:extLst>
-          </p:cNvPr>
-          <p:cNvSpPr txBox="1"/>
-          <p:nvPr/>
-        </p:nvSpPr>
-        <p:spPr>
-          <a:xfrm>
-            <a:off x="190617" y="2583809"/>
-            <a:ext cx="646331" cy="276999"/>
-          </a:xfrm>
-          <a:prstGeom prst="rect">
-            <a:avLst/>
-          </a:prstGeom>
-          <a:noFill/>
-        </p:spPr>
-        <p:txBody>
-          <a:bodyPr wrap="none" rtlCol="0">
-            <a:spAutoFit/>
-          </a:bodyPr>
-          <a:lstStyle/>
-          <a:p>
-            <a:r>
-              <a:rPr lang="zh-CN" altLang="en-US" sz="1200" dirty="0">
-                <a:latin typeface="宋体" panose="02010600030101010101" pitchFamily="2" charset="-122"/>
-                <a:ea typeface="宋体" panose="02010600030101010101" pitchFamily="2" charset="-122"/>
-              </a:rPr>
-              <a:t>业务层</a:t>
-            </a:r>
-          </a:p>
-        </p:txBody>
-      </p:sp>
-      <p:sp>
-        <p:nvSpPr>
-          <p:cNvPr id="28" name="矩形 27">
-            <a:extLst>
-              <a:ext uri="{FF2B5EF4-FFF2-40B4-BE49-F238E27FC236}">
-                <a16:creationId xmlns:a16="http://schemas.microsoft.com/office/drawing/2014/main" id="{FD9D5D26-E356-4982-AB8F-F365A18998E7}"/>
-              </a:ext>
-            </a:extLst>
-          </p:cNvPr>
-          <p:cNvSpPr/>
-          <p:nvPr/>
-        </p:nvSpPr>
-        <p:spPr>
-          <a:xfrm>
-            <a:off x="1149668" y="2290795"/>
-            <a:ext cx="862584" cy="285750"/>
-          </a:xfrm>
-          <a:prstGeom prst="rect">
-            <a:avLst/>
-          </a:prstGeom>
-          <a:noFill/>
-          <a:ln>
-            <a:solidFill>
-              <a:schemeClr val="tx1"/>
-            </a:solidFill>
-          </a:ln>
-        </p:spPr>
-        <p:style>
-          <a:lnRef idx="2">
-            <a:schemeClr val="accent1">
-              <a:shade val="50000"/>
-            </a:schemeClr>
-          </a:lnRef>
-          <a:fillRef idx="1">
-            <a:schemeClr val="accent1"/>
-          </a:fillRef>
-          <a:effectRef idx="0">
-            <a:schemeClr val="accent1"/>
-          </a:effectRef>
-          <a:fontRef idx="minor">
-            <a:schemeClr val="lt1"/>
-          </a:fontRef>
-        </p:style>
-        <p:txBody>
-          <a:bodyPr rtlCol="0" anchor="ctr"/>
-          <a:lstStyle/>
-          <a:p>
-            <a:pPr algn="ctr"/>
-            <a:r>
-              <a:rPr lang="zh-CN" altLang="en-US" sz="1200" dirty="0">
-                <a:solidFill>
-                  <a:schemeClr val="tx1"/>
-                </a:solidFill>
-                <a:latin typeface="宋体" panose="02010600030101010101" pitchFamily="2" charset="-122"/>
-                <a:ea typeface="宋体" panose="02010600030101010101" pitchFamily="2" charset="-122"/>
-              </a:rPr>
-              <a:t>登录注册</a:t>
-            </a:r>
-          </a:p>
-        </p:txBody>
-      </p:sp>
-      <p:sp>
-        <p:nvSpPr>
-          <p:cNvPr id="29" name="矩形 28">
-            <a:extLst>
-              <a:ext uri="{FF2B5EF4-FFF2-40B4-BE49-F238E27FC236}">
-                <a16:creationId xmlns:a16="http://schemas.microsoft.com/office/drawing/2014/main" id="{2661E61C-BA70-49B4-B93F-68F9F7643C9C}"/>
-              </a:ext>
-            </a:extLst>
-          </p:cNvPr>
-          <p:cNvSpPr/>
-          <p:nvPr/>
-        </p:nvSpPr>
-        <p:spPr>
-          <a:xfrm>
-            <a:off x="1149668" y="2870159"/>
-            <a:ext cx="862584" cy="285750"/>
-          </a:xfrm>
-          <a:prstGeom prst="rect">
-            <a:avLst/>
-          </a:prstGeom>
-          <a:noFill/>
-          <a:ln>
-            <a:solidFill>
-              <a:schemeClr val="tx1"/>
-            </a:solidFill>
-          </a:ln>
-        </p:spPr>
-        <p:style>
-          <a:lnRef idx="2">
-            <a:schemeClr val="accent1">
-              <a:shade val="50000"/>
-            </a:schemeClr>
-          </a:lnRef>
-          <a:fillRef idx="1">
-            <a:schemeClr val="accent1"/>
-          </a:fillRef>
-          <a:effectRef idx="0">
-            <a:schemeClr val="accent1"/>
-          </a:effectRef>
-          <a:fontRef idx="minor">
-            <a:schemeClr val="lt1"/>
-          </a:fontRef>
-        </p:style>
-        <p:txBody>
-          <a:bodyPr rtlCol="0" anchor="ctr"/>
-          <a:lstStyle/>
-          <a:p>
-            <a:pPr algn="ctr"/>
-            <a:r>
-              <a:rPr lang="zh-CN" altLang="en-US" sz="1200" dirty="0">
-                <a:solidFill>
-                  <a:schemeClr val="tx1"/>
-                </a:solidFill>
-                <a:latin typeface="宋体" panose="02010600030101010101" pitchFamily="2" charset="-122"/>
-                <a:ea typeface="宋体" panose="02010600030101010101" pitchFamily="2" charset="-122"/>
-              </a:rPr>
-              <a:t>流量分析</a:t>
-            </a:r>
-          </a:p>
-        </p:txBody>
-      </p:sp>
-      <p:sp>
-        <p:nvSpPr>
-          <p:cNvPr id="30" name="矩形 29">
-            <a:extLst>
-              <a:ext uri="{FF2B5EF4-FFF2-40B4-BE49-F238E27FC236}">
-                <a16:creationId xmlns:a16="http://schemas.microsoft.com/office/drawing/2014/main" id="{7BA1971D-583C-469D-AE1E-B5288BD6F1CF}"/>
-              </a:ext>
-            </a:extLst>
-          </p:cNvPr>
-          <p:cNvSpPr/>
-          <p:nvPr/>
-        </p:nvSpPr>
-        <p:spPr>
-          <a:xfrm>
-            <a:off x="2322957" y="2288881"/>
-            <a:ext cx="1123281" cy="285750"/>
-          </a:xfrm>
-          <a:prstGeom prst="rect">
-            <a:avLst/>
-          </a:prstGeom>
-          <a:noFill/>
-          <a:ln>
-            <a:solidFill>
-              <a:schemeClr val="tx1"/>
-            </a:solidFill>
-          </a:ln>
-        </p:spPr>
-        <p:style>
-          <a:lnRef idx="2">
-            <a:schemeClr val="accent1">
-              <a:shade val="50000"/>
-            </a:schemeClr>
-          </a:lnRef>
-          <a:fillRef idx="1">
-            <a:schemeClr val="accent1"/>
-          </a:fillRef>
-          <a:effectRef idx="0">
-            <a:schemeClr val="accent1"/>
-          </a:effectRef>
-          <a:fontRef idx="minor">
-            <a:schemeClr val="lt1"/>
-          </a:fontRef>
-        </p:style>
-        <p:txBody>
-          <a:bodyPr rtlCol="0" anchor="ctr"/>
-          <a:lstStyle/>
-          <a:p>
-            <a:pPr algn="ctr"/>
-            <a:r>
-              <a:rPr lang="zh-CN" altLang="en-US" sz="1200" dirty="0">
-                <a:solidFill>
-                  <a:schemeClr val="tx1"/>
-                </a:solidFill>
-                <a:latin typeface="宋体" panose="02010600030101010101" pitchFamily="2" charset="-122"/>
-                <a:ea typeface="宋体" panose="02010600030101010101" pitchFamily="2" charset="-122"/>
-              </a:rPr>
-              <a:t>用户信息管理</a:t>
-            </a:r>
-          </a:p>
-        </p:txBody>
-      </p:sp>
-      <p:sp>
-        <p:nvSpPr>
-          <p:cNvPr id="31" name="矩形 30">
-            <a:extLst>
-              <a:ext uri="{FF2B5EF4-FFF2-40B4-BE49-F238E27FC236}">
-                <a16:creationId xmlns:a16="http://schemas.microsoft.com/office/drawing/2014/main" id="{692D77D7-FCE6-4FFA-BBA1-A9B052D76F6D}"/>
-              </a:ext>
-            </a:extLst>
-          </p:cNvPr>
-          <p:cNvSpPr/>
-          <p:nvPr/>
-        </p:nvSpPr>
-        <p:spPr>
-          <a:xfrm>
-            <a:off x="2322957" y="2863380"/>
-            <a:ext cx="1123281" cy="285750"/>
-          </a:xfrm>
-          <a:prstGeom prst="rect">
-            <a:avLst/>
-          </a:prstGeom>
-          <a:noFill/>
-          <a:ln>
-            <a:solidFill>
-              <a:schemeClr val="tx1"/>
-            </a:solidFill>
-          </a:ln>
-        </p:spPr>
-        <p:style>
-          <a:lnRef idx="2">
-            <a:schemeClr val="accent1">
-              <a:shade val="50000"/>
-            </a:schemeClr>
-          </a:lnRef>
-          <a:fillRef idx="1">
-            <a:schemeClr val="accent1"/>
-          </a:fillRef>
-          <a:effectRef idx="0">
-            <a:schemeClr val="accent1"/>
-          </a:effectRef>
-          <a:fontRef idx="minor">
-            <a:schemeClr val="lt1"/>
-          </a:fontRef>
-        </p:style>
-        <p:txBody>
-          <a:bodyPr rtlCol="0" anchor="ctr"/>
-          <a:lstStyle/>
-          <a:p>
-            <a:pPr algn="ctr"/>
-            <a:r>
-              <a:rPr lang="zh-CN" altLang="en-US" sz="1200" dirty="0">
-                <a:solidFill>
-                  <a:schemeClr val="tx1"/>
-                </a:solidFill>
-                <a:latin typeface="宋体" panose="02010600030101010101" pitchFamily="2" charset="-122"/>
-                <a:ea typeface="宋体" panose="02010600030101010101" pitchFamily="2" charset="-122"/>
-              </a:rPr>
-              <a:t>流量统计</a:t>
-            </a:r>
-          </a:p>
-        </p:txBody>
-      </p:sp>
-      <p:sp>
-        <p:nvSpPr>
-          <p:cNvPr id="32" name="矩形 31">
-            <a:extLst>
-              <a:ext uri="{FF2B5EF4-FFF2-40B4-BE49-F238E27FC236}">
-                <a16:creationId xmlns:a16="http://schemas.microsoft.com/office/drawing/2014/main" id="{196C3268-8267-4A9D-B4E2-6BA8AAC170AF}"/>
-              </a:ext>
-            </a:extLst>
-          </p:cNvPr>
-          <p:cNvSpPr/>
-          <p:nvPr/>
-        </p:nvSpPr>
-        <p:spPr>
-          <a:xfrm>
-            <a:off x="3762766" y="2288881"/>
-            <a:ext cx="795765" cy="285750"/>
-          </a:xfrm>
-          <a:prstGeom prst="rect">
-            <a:avLst/>
-          </a:prstGeom>
-          <a:noFill/>
-          <a:ln>
-            <a:solidFill>
-              <a:schemeClr val="tx1"/>
-            </a:solidFill>
-          </a:ln>
-        </p:spPr>
-        <p:style>
-          <a:lnRef idx="2">
-            <a:schemeClr val="accent1">
-              <a:shade val="50000"/>
-            </a:schemeClr>
-          </a:lnRef>
-          <a:fillRef idx="1">
-            <a:schemeClr val="accent1"/>
-          </a:fillRef>
-          <a:effectRef idx="0">
-            <a:schemeClr val="accent1"/>
-          </a:effectRef>
-          <a:fontRef idx="minor">
-            <a:schemeClr val="lt1"/>
-          </a:fontRef>
-        </p:style>
-        <p:txBody>
-          <a:bodyPr rtlCol="0" anchor="ctr"/>
-          <a:lstStyle/>
-          <a:p>
-            <a:pPr algn="ctr"/>
-            <a:r>
-              <a:rPr lang="zh-CN" altLang="en-US" sz="1200" dirty="0">
-                <a:solidFill>
-                  <a:schemeClr val="tx1"/>
-                </a:solidFill>
-                <a:latin typeface="宋体" panose="02010600030101010101" pitchFamily="2" charset="-122"/>
-                <a:ea typeface="宋体" panose="02010600030101010101" pitchFamily="2" charset="-122"/>
-              </a:rPr>
-              <a:t>流量管理</a:t>
-            </a:r>
-          </a:p>
-        </p:txBody>
-      </p:sp>
-      <p:sp>
-        <p:nvSpPr>
-          <p:cNvPr id="33" name="矩形 32">
-            <a:extLst>
-              <a:ext uri="{FF2B5EF4-FFF2-40B4-BE49-F238E27FC236}">
-                <a16:creationId xmlns:a16="http://schemas.microsoft.com/office/drawing/2014/main" id="{745CCF8A-2F17-4681-B711-711C16034D7F}"/>
-              </a:ext>
-            </a:extLst>
-          </p:cNvPr>
-          <p:cNvSpPr/>
-          <p:nvPr/>
-        </p:nvSpPr>
-        <p:spPr>
-          <a:xfrm>
-            <a:off x="3762766" y="2855231"/>
-            <a:ext cx="795765" cy="285750"/>
-          </a:xfrm>
-          <a:prstGeom prst="rect">
-            <a:avLst/>
-          </a:prstGeom>
-          <a:noFill/>
-          <a:ln>
-            <a:solidFill>
-              <a:schemeClr val="tx1"/>
-            </a:solidFill>
-          </a:ln>
-        </p:spPr>
-        <p:style>
-          <a:lnRef idx="2">
-            <a:schemeClr val="accent1">
-              <a:shade val="50000"/>
-            </a:schemeClr>
-          </a:lnRef>
-          <a:fillRef idx="1">
-            <a:schemeClr val="accent1"/>
-          </a:fillRef>
-          <a:effectRef idx="0">
-            <a:schemeClr val="accent1"/>
-          </a:effectRef>
-          <a:fontRef idx="minor">
-            <a:schemeClr val="lt1"/>
-          </a:fontRef>
-        </p:style>
-        <p:txBody>
-          <a:bodyPr rtlCol="0" anchor="ctr"/>
-          <a:lstStyle/>
-          <a:p>
-            <a:pPr algn="ctr"/>
-            <a:r>
-              <a:rPr lang="zh-CN" altLang="en-US" sz="1200" dirty="0">
-                <a:solidFill>
-                  <a:schemeClr val="tx1"/>
-                </a:solidFill>
-                <a:latin typeface="宋体" panose="02010600030101010101" pitchFamily="2" charset="-122"/>
-                <a:ea typeface="宋体" panose="02010600030101010101" pitchFamily="2" charset="-122"/>
-              </a:rPr>
-              <a:t>流量查询</a:t>
-            </a:r>
-          </a:p>
-        </p:txBody>
-      </p:sp>
-      <p:grpSp>
-        <p:nvGrpSpPr>
-          <p:cNvPr id="40" name="组合 39">
-            <a:extLst>
-              <a:ext uri="{FF2B5EF4-FFF2-40B4-BE49-F238E27FC236}">
-                <a16:creationId xmlns:a16="http://schemas.microsoft.com/office/drawing/2014/main" id="{4C13F0C1-611B-48E7-9349-8EE193CE2718}"/>
+                <a16:creationId xmlns:a16="http://schemas.microsoft.com/office/drawing/2014/main" id="{F8CC0890-4BAA-4636-9AB6-F4869F6FB699}"/>
               </a:ext>
             </a:extLst>
           </p:cNvPr>
@@ -4058,18 +2985,18 @@
         </p:nvGrpSpPr>
         <p:grpSpPr>
           <a:xfrm>
-            <a:off x="195559" y="4197865"/>
-            <a:ext cx="5133976" cy="584891"/>
-            <a:chOff x="6980199" y="5834959"/>
-            <a:chExt cx="5133976" cy="584891"/>
+            <a:off x="30162" y="134778"/>
+            <a:ext cx="6419850" cy="5489893"/>
+            <a:chOff x="30162" y="375919"/>
+            <a:chExt cx="6419850" cy="5489893"/>
           </a:xfrm>
         </p:grpSpPr>
         <p:sp>
           <p:nvSpPr>
-            <p:cNvPr id="34" name="矩形 33">
+            <p:cNvPr id="8" name="矩形 7">
               <a:extLst>
                 <a:ext uri="{FF2B5EF4-FFF2-40B4-BE49-F238E27FC236}">
-                  <a16:creationId xmlns:a16="http://schemas.microsoft.com/office/drawing/2014/main" id="{538C7C6E-853E-4E38-8637-7CE1EDAE3591}"/>
+                  <a16:creationId xmlns:a16="http://schemas.microsoft.com/office/drawing/2014/main" id="{6967133F-3188-49BA-89E1-C647CD2762DA}"/>
                 </a:ext>
               </a:extLst>
             </p:cNvPr>
@@ -4078,14 +3005,66 @@
           </p:nvSpPr>
           <p:spPr>
             <a:xfrm>
-              <a:off x="6980199" y="5834959"/>
-              <a:ext cx="5133976" cy="584891"/>
+              <a:off x="30162" y="375919"/>
+              <a:ext cx="6419850" cy="5489893"/>
+            </a:xfrm>
+            <a:prstGeom prst="rect">
+              <a:avLst/>
+            </a:prstGeom>
+            <a:noFill/>
+            <a:ln>
+              <a:solidFill>
+                <a:schemeClr val="tx1"/>
+              </a:solidFill>
+            </a:ln>
+          </p:spPr>
+          <p:style>
+            <a:lnRef idx="2">
+              <a:schemeClr val="accent1">
+                <a:shade val="50000"/>
+              </a:schemeClr>
+            </a:lnRef>
+            <a:fillRef idx="1">
+              <a:schemeClr val="accent1"/>
+            </a:fillRef>
+            <a:effectRef idx="0">
+              <a:schemeClr val="accent1"/>
+            </a:effectRef>
+            <a:fontRef idx="minor">
+              <a:schemeClr val="lt1"/>
+            </a:fontRef>
+          </p:style>
+          <p:txBody>
+            <a:bodyPr rtlCol="0" anchor="ctr"/>
+            <a:lstStyle/>
+            <a:p>
+              <a:pPr algn="ctr"/>
+              <a:endParaRPr lang="zh-CN" altLang="en-US"/>
+            </a:p>
+          </p:txBody>
+        </p:sp>
+        <p:sp>
+          <p:nvSpPr>
+            <p:cNvPr id="9" name="矩形 8">
+              <a:extLst>
+                <a:ext uri="{FF2B5EF4-FFF2-40B4-BE49-F238E27FC236}">
+                  <a16:creationId xmlns:a16="http://schemas.microsoft.com/office/drawing/2014/main" id="{9A46188A-82FB-4055-AB2A-E1F75ECEA918}"/>
+                </a:ext>
+              </a:extLst>
+            </p:cNvPr>
+            <p:cNvSpPr/>
+            <p:nvPr/>
+          </p:nvSpPr>
+          <p:spPr>
+            <a:xfrm>
+              <a:off x="185737" y="499590"/>
+              <a:ext cx="6108700" cy="1126397"/>
             </a:xfrm>
             <a:prstGeom prst="rect">
               <a:avLst/>
             </a:prstGeom>
             <a:solidFill>
-              <a:srgbClr val="D3D3F6"/>
+              <a:srgbClr val="E7ECEC"/>
             </a:solidFill>
             <a:ln>
               <a:noFill/>
@@ -4118,10 +3097,10 @@
         </p:sp>
         <p:sp>
           <p:nvSpPr>
-            <p:cNvPr id="35" name="文本框 34">
+            <p:cNvPr id="10" name="文本框 9">
               <a:extLst>
                 <a:ext uri="{FF2B5EF4-FFF2-40B4-BE49-F238E27FC236}">
-                  <a16:creationId xmlns:a16="http://schemas.microsoft.com/office/drawing/2014/main" id="{00D62D96-7059-46EB-948B-7C8F6F96F91D}"/>
+                  <a16:creationId xmlns:a16="http://schemas.microsoft.com/office/drawing/2014/main" id="{00832735-D44B-4DEA-BF6C-351F71D7D9DD}"/>
                 </a:ext>
               </a:extLst>
             </p:cNvPr>
@@ -4130,8 +3109,8 @@
           </p:nvSpPr>
           <p:spPr>
             <a:xfrm>
-              <a:off x="6980199" y="5982210"/>
-              <a:ext cx="646331" cy="276999"/>
+              <a:off x="164838" y="613575"/>
+              <a:ext cx="954107" cy="276999"/>
             </a:xfrm>
             <a:prstGeom prst="rect">
               <a:avLst/>
@@ -4149,17 +3128,17 @@
                   <a:latin typeface="宋体" panose="02010600030101010101" pitchFamily="2" charset="-122"/>
                   <a:ea typeface="宋体" panose="02010600030101010101" pitchFamily="2" charset="-122"/>
                 </a:rPr>
-                <a:t>数据层</a:t>
+                <a:t>应用表现层</a:t>
               </a:r>
             </a:p>
           </p:txBody>
         </p:sp>
         <p:sp>
           <p:nvSpPr>
-            <p:cNvPr id="36" name="矩形 35">
+            <p:cNvPr id="12" name="矩形 11">
               <a:extLst>
                 <a:ext uri="{FF2B5EF4-FFF2-40B4-BE49-F238E27FC236}">
-                  <a16:creationId xmlns:a16="http://schemas.microsoft.com/office/drawing/2014/main" id="{5245BC36-6E7F-4A51-A04A-D136E5049975}"/>
+                  <a16:creationId xmlns:a16="http://schemas.microsoft.com/office/drawing/2014/main" id="{F2471AF0-0390-4509-AF18-5BF2D5F58552}"/>
                 </a:ext>
               </a:extLst>
             </p:cNvPr>
@@ -4168,8 +3147,280 @@
           </p:nvSpPr>
           <p:spPr>
             <a:xfrm>
-              <a:off x="7662947" y="5977833"/>
+              <a:off x="1353271" y="670480"/>
               <a:ext cx="707009" cy="285750"/>
+            </a:xfrm>
+            <a:prstGeom prst="rect">
+              <a:avLst/>
+            </a:prstGeom>
+            <a:noFill/>
+            <a:ln>
+              <a:solidFill>
+                <a:schemeClr val="tx1"/>
+              </a:solidFill>
+            </a:ln>
+          </p:spPr>
+          <p:style>
+            <a:lnRef idx="2">
+              <a:schemeClr val="accent1">
+                <a:shade val="50000"/>
+              </a:schemeClr>
+            </a:lnRef>
+            <a:fillRef idx="1">
+              <a:schemeClr val="accent1"/>
+            </a:fillRef>
+            <a:effectRef idx="0">
+              <a:schemeClr val="accent1"/>
+            </a:effectRef>
+            <a:fontRef idx="minor">
+              <a:schemeClr val="lt1"/>
+            </a:fontRef>
+          </p:style>
+          <p:txBody>
+            <a:bodyPr rtlCol="0" anchor="ctr"/>
+            <a:lstStyle/>
+            <a:p>
+              <a:pPr algn="ctr"/>
+              <a:r>
+                <a:rPr lang="en-US" altLang="zh-CN" sz="1200" dirty="0">
+                  <a:solidFill>
+                    <a:schemeClr val="tx1"/>
+                  </a:solidFill>
+                  <a:latin typeface="宋体" panose="02010600030101010101" pitchFamily="2" charset="-122"/>
+                  <a:ea typeface="宋体" panose="02010600030101010101" pitchFamily="2" charset="-122"/>
+                </a:rPr>
+                <a:t>Html</a:t>
+              </a:r>
+              <a:endParaRPr lang="zh-CN" altLang="en-US" sz="1200" dirty="0">
+                <a:solidFill>
+                  <a:schemeClr val="tx1"/>
+                </a:solidFill>
+                <a:latin typeface="宋体" panose="02010600030101010101" pitchFamily="2" charset="-122"/>
+                <a:ea typeface="宋体" panose="02010600030101010101" pitchFamily="2" charset="-122"/>
+              </a:endParaRPr>
+            </a:p>
+          </p:txBody>
+        </p:sp>
+        <p:sp>
+          <p:nvSpPr>
+            <p:cNvPr id="13" name="矩形 12">
+              <a:extLst>
+                <a:ext uri="{FF2B5EF4-FFF2-40B4-BE49-F238E27FC236}">
+                  <a16:creationId xmlns:a16="http://schemas.microsoft.com/office/drawing/2014/main" id="{21813305-6516-4878-9AC2-9C8E5D80719B}"/>
+                </a:ext>
+              </a:extLst>
+            </p:cNvPr>
+            <p:cNvSpPr/>
+            <p:nvPr/>
+          </p:nvSpPr>
+          <p:spPr>
+            <a:xfrm>
+              <a:off x="2771392" y="676275"/>
+              <a:ext cx="707009" cy="285750"/>
+            </a:xfrm>
+            <a:prstGeom prst="rect">
+              <a:avLst/>
+            </a:prstGeom>
+            <a:noFill/>
+            <a:ln>
+              <a:solidFill>
+                <a:schemeClr val="tx1"/>
+              </a:solidFill>
+            </a:ln>
+          </p:spPr>
+          <p:style>
+            <a:lnRef idx="2">
+              <a:schemeClr val="accent1">
+                <a:shade val="50000"/>
+              </a:schemeClr>
+            </a:lnRef>
+            <a:fillRef idx="1">
+              <a:schemeClr val="accent1"/>
+            </a:fillRef>
+            <a:effectRef idx="0">
+              <a:schemeClr val="accent1"/>
+            </a:effectRef>
+            <a:fontRef idx="minor">
+              <a:schemeClr val="lt1"/>
+            </a:fontRef>
+          </p:style>
+          <p:txBody>
+            <a:bodyPr rtlCol="0" anchor="ctr"/>
+            <a:lstStyle/>
+            <a:p>
+              <a:pPr algn="ctr"/>
+              <a:r>
+                <a:rPr lang="en-US" altLang="zh-CN" sz="1200" dirty="0">
+                  <a:solidFill>
+                    <a:schemeClr val="tx1"/>
+                  </a:solidFill>
+                  <a:latin typeface="宋体" panose="02010600030101010101" pitchFamily="2" charset="-122"/>
+                  <a:ea typeface="宋体" panose="02010600030101010101" pitchFamily="2" charset="-122"/>
+                </a:rPr>
+                <a:t>CSS</a:t>
+              </a:r>
+              <a:endParaRPr lang="zh-CN" altLang="en-US" sz="1200" dirty="0">
+                <a:solidFill>
+                  <a:schemeClr val="tx1"/>
+                </a:solidFill>
+                <a:latin typeface="宋体" panose="02010600030101010101" pitchFamily="2" charset="-122"/>
+                <a:ea typeface="宋体" panose="02010600030101010101" pitchFamily="2" charset="-122"/>
+              </a:endParaRPr>
+            </a:p>
+          </p:txBody>
+        </p:sp>
+        <p:sp>
+          <p:nvSpPr>
+            <p:cNvPr id="14" name="矩形 13">
+              <a:extLst>
+                <a:ext uri="{FF2B5EF4-FFF2-40B4-BE49-F238E27FC236}">
+                  <a16:creationId xmlns:a16="http://schemas.microsoft.com/office/drawing/2014/main" id="{389E6F0F-7918-463B-9752-3A27DB783BE8}"/>
+                </a:ext>
+              </a:extLst>
+            </p:cNvPr>
+            <p:cNvSpPr/>
+            <p:nvPr/>
+          </p:nvSpPr>
+          <p:spPr>
+            <a:xfrm>
+              <a:off x="3752943" y="670480"/>
+              <a:ext cx="707009" cy="285750"/>
+            </a:xfrm>
+            <a:prstGeom prst="rect">
+              <a:avLst/>
+            </a:prstGeom>
+            <a:noFill/>
+            <a:ln>
+              <a:solidFill>
+                <a:schemeClr val="tx1"/>
+              </a:solidFill>
+            </a:ln>
+          </p:spPr>
+          <p:style>
+            <a:lnRef idx="2">
+              <a:schemeClr val="accent1">
+                <a:shade val="50000"/>
+              </a:schemeClr>
+            </a:lnRef>
+            <a:fillRef idx="1">
+              <a:schemeClr val="accent1"/>
+            </a:fillRef>
+            <a:effectRef idx="0">
+              <a:schemeClr val="accent1"/>
+            </a:effectRef>
+            <a:fontRef idx="minor">
+              <a:schemeClr val="lt1"/>
+            </a:fontRef>
+          </p:style>
+          <p:txBody>
+            <a:bodyPr rtlCol="0" anchor="ctr"/>
+            <a:lstStyle/>
+            <a:p>
+              <a:pPr algn="ctr"/>
+              <a:r>
+                <a:rPr lang="en-US" altLang="zh-CN" sz="1200" dirty="0">
+                  <a:solidFill>
+                    <a:schemeClr val="tx1"/>
+                  </a:solidFill>
+                  <a:latin typeface="宋体" panose="02010600030101010101" pitchFamily="2" charset="-122"/>
+                  <a:ea typeface="宋体" panose="02010600030101010101" pitchFamily="2" charset="-122"/>
+                </a:rPr>
+                <a:t>Vue</a:t>
+              </a:r>
+              <a:endParaRPr lang="zh-CN" altLang="en-US" sz="1200" dirty="0">
+                <a:solidFill>
+                  <a:schemeClr val="tx1"/>
+                </a:solidFill>
+                <a:latin typeface="宋体" panose="02010600030101010101" pitchFamily="2" charset="-122"/>
+                <a:ea typeface="宋体" panose="02010600030101010101" pitchFamily="2" charset="-122"/>
+              </a:endParaRPr>
+            </a:p>
+          </p:txBody>
+        </p:sp>
+        <p:sp>
+          <p:nvSpPr>
+            <p:cNvPr id="16" name="矩形 15">
+              <a:extLst>
+                <a:ext uri="{FF2B5EF4-FFF2-40B4-BE49-F238E27FC236}">
+                  <a16:creationId xmlns:a16="http://schemas.microsoft.com/office/drawing/2014/main" id="{8F94AB9A-0FCB-4020-860F-945140401C7C}"/>
+                </a:ext>
+              </a:extLst>
+            </p:cNvPr>
+            <p:cNvSpPr/>
+            <p:nvPr/>
+          </p:nvSpPr>
+          <p:spPr>
+            <a:xfrm>
+              <a:off x="4872410" y="670232"/>
+              <a:ext cx="782114" cy="285750"/>
+            </a:xfrm>
+            <a:prstGeom prst="rect">
+              <a:avLst/>
+            </a:prstGeom>
+            <a:noFill/>
+            <a:ln>
+              <a:solidFill>
+                <a:schemeClr val="tx1"/>
+              </a:solidFill>
+            </a:ln>
+          </p:spPr>
+          <p:style>
+            <a:lnRef idx="2">
+              <a:schemeClr val="accent1">
+                <a:shade val="50000"/>
+              </a:schemeClr>
+            </a:lnRef>
+            <a:fillRef idx="1">
+              <a:schemeClr val="accent1"/>
+            </a:fillRef>
+            <a:effectRef idx="0">
+              <a:schemeClr val="accent1"/>
+            </a:effectRef>
+            <a:fontRef idx="minor">
+              <a:schemeClr val="lt1"/>
+            </a:fontRef>
+          </p:style>
+          <p:txBody>
+            <a:bodyPr rtlCol="0" anchor="ctr"/>
+            <a:lstStyle/>
+            <a:p>
+              <a:pPr algn="ctr"/>
+              <a:r>
+                <a:rPr lang="en-US" altLang="zh-CN" sz="1200" dirty="0">
+                  <a:solidFill>
+                    <a:schemeClr val="tx1"/>
+                  </a:solidFill>
+                  <a:latin typeface="宋体" panose="02010600030101010101" pitchFamily="2" charset="-122"/>
+                  <a:ea typeface="宋体" panose="02010600030101010101" pitchFamily="2" charset="-122"/>
+                </a:rPr>
+                <a:t>ECharts</a:t>
+              </a:r>
+              <a:endParaRPr lang="zh-CN" altLang="en-US" sz="1200" dirty="0">
+                <a:solidFill>
+                  <a:schemeClr val="tx1"/>
+                </a:solidFill>
+                <a:latin typeface="宋体" panose="02010600030101010101" pitchFamily="2" charset="-122"/>
+                <a:ea typeface="宋体" panose="02010600030101010101" pitchFamily="2" charset="-122"/>
+              </a:endParaRPr>
+            </a:p>
+          </p:txBody>
+        </p:sp>
+        <p:sp>
+          <p:nvSpPr>
+            <p:cNvPr id="17" name="矩形 16">
+              <a:extLst>
+                <a:ext uri="{FF2B5EF4-FFF2-40B4-BE49-F238E27FC236}">
+                  <a16:creationId xmlns:a16="http://schemas.microsoft.com/office/drawing/2014/main" id="{8E098161-C08C-41FB-B812-C25159C0BCBF}"/>
+                </a:ext>
+              </a:extLst>
+            </p:cNvPr>
+            <p:cNvSpPr/>
+            <p:nvPr/>
+          </p:nvSpPr>
+          <p:spPr>
+            <a:xfrm>
+              <a:off x="1348776" y="1197188"/>
+              <a:ext cx="1108007" cy="290322"/>
             </a:xfrm>
             <a:prstGeom prst="rect">
               <a:avLst/>
@@ -4210,17 +3461,17 @@
                   <a:latin typeface="宋体" panose="02010600030101010101" pitchFamily="2" charset="-122"/>
                   <a:ea typeface="宋体" panose="02010600030101010101" pitchFamily="2" charset="-122"/>
                 </a:rPr>
-                <a:t>事务</a:t>
+                <a:t>模板引擎渲染</a:t>
               </a:r>
             </a:p>
           </p:txBody>
         </p:sp>
         <p:sp>
           <p:nvSpPr>
-            <p:cNvPr id="37" name="矩形 36">
+            <p:cNvPr id="15" name="矩形 14">
               <a:extLst>
                 <a:ext uri="{FF2B5EF4-FFF2-40B4-BE49-F238E27FC236}">
-                  <a16:creationId xmlns:a16="http://schemas.microsoft.com/office/drawing/2014/main" id="{F64BEEEA-E84A-4E2B-A673-8AFE30AF4317}"/>
+                  <a16:creationId xmlns:a16="http://schemas.microsoft.com/office/drawing/2014/main" id="{F2BFBB7C-0320-4436-81AA-15D42E34EEA9}"/>
                 </a:ext>
               </a:extLst>
             </p:cNvPr>
@@ -4229,8 +3480,240 @@
           </p:nvSpPr>
           <p:spPr>
             <a:xfrm>
-              <a:off x="8533651" y="5977833"/>
-              <a:ext cx="954752" cy="285750"/>
+              <a:off x="3752943" y="1197188"/>
+              <a:ext cx="800219" cy="285750"/>
+            </a:xfrm>
+            <a:prstGeom prst="rect">
+              <a:avLst/>
+            </a:prstGeom>
+            <a:noFill/>
+            <a:ln>
+              <a:solidFill>
+                <a:schemeClr val="tx1"/>
+              </a:solidFill>
+            </a:ln>
+          </p:spPr>
+          <p:style>
+            <a:lnRef idx="2">
+              <a:schemeClr val="accent1">
+                <a:shade val="50000"/>
+              </a:schemeClr>
+            </a:lnRef>
+            <a:fillRef idx="1">
+              <a:schemeClr val="accent1"/>
+            </a:fillRef>
+            <a:effectRef idx="0">
+              <a:schemeClr val="accent1"/>
+            </a:effectRef>
+            <a:fontRef idx="minor">
+              <a:schemeClr val="lt1"/>
+            </a:fontRef>
+          </p:style>
+          <p:txBody>
+            <a:bodyPr rtlCol="0" anchor="ctr"/>
+            <a:lstStyle/>
+            <a:p>
+              <a:pPr algn="ctr"/>
+              <a:r>
+                <a:rPr lang="en-US" altLang="zh-CN" sz="1200" dirty="0">
+                  <a:solidFill>
+                    <a:schemeClr val="tx1"/>
+                  </a:solidFill>
+                  <a:latin typeface="宋体" panose="02010600030101010101" pitchFamily="2" charset="-122"/>
+                  <a:ea typeface="宋体" panose="02010600030101010101" pitchFamily="2" charset="-122"/>
+                </a:rPr>
+                <a:t>Post</a:t>
+              </a:r>
+              <a:r>
+                <a:rPr lang="zh-CN" altLang="en-US" sz="1200" dirty="0">
+                  <a:solidFill>
+                    <a:schemeClr val="tx1"/>
+                  </a:solidFill>
+                  <a:latin typeface="宋体" panose="02010600030101010101" pitchFamily="2" charset="-122"/>
+                  <a:ea typeface="宋体" panose="02010600030101010101" pitchFamily="2" charset="-122"/>
+                </a:rPr>
+                <a:t>请求</a:t>
+              </a:r>
+            </a:p>
+          </p:txBody>
+        </p:sp>
+        <p:sp>
+          <p:nvSpPr>
+            <p:cNvPr id="20" name="矩形 19">
+              <a:extLst>
+                <a:ext uri="{FF2B5EF4-FFF2-40B4-BE49-F238E27FC236}">
+                  <a16:creationId xmlns:a16="http://schemas.microsoft.com/office/drawing/2014/main" id="{FFB5E642-1844-45E7-94F8-2D4570330B75}"/>
+                </a:ext>
+              </a:extLst>
+            </p:cNvPr>
+            <p:cNvSpPr/>
+            <p:nvPr/>
+          </p:nvSpPr>
+          <p:spPr>
+            <a:xfrm>
+              <a:off x="4880961" y="1197188"/>
+              <a:ext cx="800219" cy="285750"/>
+            </a:xfrm>
+            <a:prstGeom prst="rect">
+              <a:avLst/>
+            </a:prstGeom>
+            <a:noFill/>
+            <a:ln>
+              <a:solidFill>
+                <a:schemeClr val="tx1"/>
+              </a:solidFill>
+            </a:ln>
+          </p:spPr>
+          <p:style>
+            <a:lnRef idx="2">
+              <a:schemeClr val="accent1">
+                <a:shade val="50000"/>
+              </a:schemeClr>
+            </a:lnRef>
+            <a:fillRef idx="1">
+              <a:schemeClr val="accent1"/>
+            </a:fillRef>
+            <a:effectRef idx="0">
+              <a:schemeClr val="accent1"/>
+            </a:effectRef>
+            <a:fontRef idx="minor">
+              <a:schemeClr val="lt1"/>
+            </a:fontRef>
+          </p:style>
+          <p:txBody>
+            <a:bodyPr rtlCol="0" anchor="ctr"/>
+            <a:lstStyle/>
+            <a:p>
+              <a:pPr algn="ctr"/>
+              <a:r>
+                <a:rPr lang="en-US" altLang="zh-CN" sz="1200" dirty="0">
+                  <a:solidFill>
+                    <a:schemeClr val="tx1"/>
+                  </a:solidFill>
+                  <a:latin typeface="宋体" panose="02010600030101010101" pitchFamily="2" charset="-122"/>
+                  <a:ea typeface="宋体" panose="02010600030101010101" pitchFamily="2" charset="-122"/>
+                </a:rPr>
+                <a:t>Get</a:t>
+              </a:r>
+              <a:r>
+                <a:rPr lang="zh-CN" altLang="en-US" sz="1200" dirty="0">
+                  <a:solidFill>
+                    <a:schemeClr val="tx1"/>
+                  </a:solidFill>
+                  <a:latin typeface="宋体" panose="02010600030101010101" pitchFamily="2" charset="-122"/>
+                  <a:ea typeface="宋体" panose="02010600030101010101" pitchFamily="2" charset="-122"/>
+                </a:rPr>
+                <a:t>请求</a:t>
+              </a:r>
+            </a:p>
+          </p:txBody>
+        </p:sp>
+        <p:sp>
+          <p:nvSpPr>
+            <p:cNvPr id="24" name="矩形 23">
+              <a:extLst>
+                <a:ext uri="{FF2B5EF4-FFF2-40B4-BE49-F238E27FC236}">
+                  <a16:creationId xmlns:a16="http://schemas.microsoft.com/office/drawing/2014/main" id="{6E2ABF2F-8E8F-4269-90AC-2DAFBB44A437}"/>
+                </a:ext>
+              </a:extLst>
+            </p:cNvPr>
+            <p:cNvSpPr/>
+            <p:nvPr/>
+          </p:nvSpPr>
+          <p:spPr>
+            <a:xfrm>
+              <a:off x="185736" y="1912163"/>
+              <a:ext cx="5133976" cy="1112293"/>
+            </a:xfrm>
+            <a:prstGeom prst="rect">
+              <a:avLst/>
+            </a:prstGeom>
+            <a:solidFill>
+              <a:srgbClr val="D8F5F5"/>
+            </a:solidFill>
+            <a:ln>
+              <a:noFill/>
+            </a:ln>
+          </p:spPr>
+          <p:style>
+            <a:lnRef idx="2">
+              <a:schemeClr val="accent1">
+                <a:shade val="50000"/>
+              </a:schemeClr>
+            </a:lnRef>
+            <a:fillRef idx="1">
+              <a:schemeClr val="accent1"/>
+            </a:fillRef>
+            <a:effectRef idx="0">
+              <a:schemeClr val="accent1"/>
+            </a:effectRef>
+            <a:fontRef idx="minor">
+              <a:schemeClr val="lt1"/>
+            </a:fontRef>
+          </p:style>
+          <p:txBody>
+            <a:bodyPr rtlCol="0" anchor="ctr"/>
+            <a:lstStyle/>
+            <a:p>
+              <a:pPr algn="ctr"/>
+              <a:endParaRPr lang="zh-CN" altLang="en-US" dirty="0"/>
+            </a:p>
+          </p:txBody>
+        </p:sp>
+        <p:sp>
+          <p:nvSpPr>
+            <p:cNvPr id="26" name="文本框 25">
+              <a:extLst>
+                <a:ext uri="{FF2B5EF4-FFF2-40B4-BE49-F238E27FC236}">
+                  <a16:creationId xmlns:a16="http://schemas.microsoft.com/office/drawing/2014/main" id="{6FF3AAF6-8B07-4ABB-8440-D04BE301D88B}"/>
+                </a:ext>
+              </a:extLst>
+            </p:cNvPr>
+            <p:cNvSpPr txBox="1"/>
+            <p:nvPr/>
+          </p:nvSpPr>
+          <p:spPr>
+            <a:xfrm>
+              <a:off x="180794" y="2329809"/>
+              <a:ext cx="646331" cy="276999"/>
+            </a:xfrm>
+            <a:prstGeom prst="rect">
+              <a:avLst/>
+            </a:prstGeom>
+            <a:noFill/>
+          </p:spPr>
+          <p:txBody>
+            <a:bodyPr wrap="none" rtlCol="0">
+              <a:spAutoFit/>
+            </a:bodyPr>
+            <a:lstStyle/>
+            <a:p>
+              <a:r>
+                <a:rPr lang="zh-CN" altLang="en-US" sz="1200" dirty="0">
+                  <a:latin typeface="宋体" panose="02010600030101010101" pitchFamily="2" charset="-122"/>
+                  <a:ea typeface="宋体" panose="02010600030101010101" pitchFamily="2" charset="-122"/>
+                </a:rPr>
+                <a:t>业务层</a:t>
+              </a:r>
+            </a:p>
+          </p:txBody>
+        </p:sp>
+        <p:sp>
+          <p:nvSpPr>
+            <p:cNvPr id="28" name="矩形 27">
+              <a:extLst>
+                <a:ext uri="{FF2B5EF4-FFF2-40B4-BE49-F238E27FC236}">
+                  <a16:creationId xmlns:a16="http://schemas.microsoft.com/office/drawing/2014/main" id="{FD9D5D26-E356-4982-AB8F-F365A18998E7}"/>
+                </a:ext>
+              </a:extLst>
+            </p:cNvPr>
+            <p:cNvSpPr/>
+            <p:nvPr/>
+          </p:nvSpPr>
+          <p:spPr>
+            <a:xfrm>
+              <a:off x="1139845" y="2036795"/>
+              <a:ext cx="862584" cy="285750"/>
             </a:xfrm>
             <a:prstGeom prst="rect">
               <a:avLst/>
@@ -4271,17 +3754,17 @@
                   <a:latin typeface="宋体" panose="02010600030101010101" pitchFamily="2" charset="-122"/>
                   <a:ea typeface="宋体" panose="02010600030101010101" pitchFamily="2" charset="-122"/>
                 </a:rPr>
-                <a:t>读写数据库</a:t>
+                <a:t>登录注册</a:t>
               </a:r>
             </a:p>
           </p:txBody>
         </p:sp>
         <p:sp>
           <p:nvSpPr>
-            <p:cNvPr id="38" name="矩形 37">
+            <p:cNvPr id="29" name="矩形 28">
               <a:extLst>
                 <a:ext uri="{FF2B5EF4-FFF2-40B4-BE49-F238E27FC236}">
-                  <a16:creationId xmlns:a16="http://schemas.microsoft.com/office/drawing/2014/main" id="{35731CFF-17C0-411E-AEFF-BA3F62F8930E}"/>
+                  <a16:creationId xmlns:a16="http://schemas.microsoft.com/office/drawing/2014/main" id="{2661E61C-BA70-49B4-B93F-68F9F7643C9C}"/>
                 </a:ext>
               </a:extLst>
             </p:cNvPr>
@@ -4290,8 +3773,836 @@
           </p:nvSpPr>
           <p:spPr>
             <a:xfrm>
-              <a:off x="9652098" y="5977833"/>
-              <a:ext cx="1241370" cy="285750"/>
+              <a:off x="1139845" y="2616159"/>
+              <a:ext cx="862584" cy="285750"/>
+            </a:xfrm>
+            <a:prstGeom prst="rect">
+              <a:avLst/>
+            </a:prstGeom>
+            <a:noFill/>
+            <a:ln>
+              <a:solidFill>
+                <a:schemeClr val="tx1"/>
+              </a:solidFill>
+            </a:ln>
+          </p:spPr>
+          <p:style>
+            <a:lnRef idx="2">
+              <a:schemeClr val="accent1">
+                <a:shade val="50000"/>
+              </a:schemeClr>
+            </a:lnRef>
+            <a:fillRef idx="1">
+              <a:schemeClr val="accent1"/>
+            </a:fillRef>
+            <a:effectRef idx="0">
+              <a:schemeClr val="accent1"/>
+            </a:effectRef>
+            <a:fontRef idx="minor">
+              <a:schemeClr val="lt1"/>
+            </a:fontRef>
+          </p:style>
+          <p:txBody>
+            <a:bodyPr rtlCol="0" anchor="ctr"/>
+            <a:lstStyle/>
+            <a:p>
+              <a:pPr algn="ctr"/>
+              <a:r>
+                <a:rPr lang="zh-CN" altLang="en-US" sz="1200" dirty="0">
+                  <a:solidFill>
+                    <a:schemeClr val="tx1"/>
+                  </a:solidFill>
+                  <a:latin typeface="宋体" panose="02010600030101010101" pitchFamily="2" charset="-122"/>
+                  <a:ea typeface="宋体" panose="02010600030101010101" pitchFamily="2" charset="-122"/>
+                </a:rPr>
+                <a:t>流量分析</a:t>
+              </a:r>
+            </a:p>
+          </p:txBody>
+        </p:sp>
+        <p:sp>
+          <p:nvSpPr>
+            <p:cNvPr id="30" name="矩形 29">
+              <a:extLst>
+                <a:ext uri="{FF2B5EF4-FFF2-40B4-BE49-F238E27FC236}">
+                  <a16:creationId xmlns:a16="http://schemas.microsoft.com/office/drawing/2014/main" id="{7BA1971D-583C-469D-AE1E-B5288BD6F1CF}"/>
+                </a:ext>
+              </a:extLst>
+            </p:cNvPr>
+            <p:cNvSpPr/>
+            <p:nvPr/>
+          </p:nvSpPr>
+          <p:spPr>
+            <a:xfrm>
+              <a:off x="2313134" y="2034881"/>
+              <a:ext cx="1123281" cy="285750"/>
+            </a:xfrm>
+            <a:prstGeom prst="rect">
+              <a:avLst/>
+            </a:prstGeom>
+            <a:noFill/>
+            <a:ln>
+              <a:solidFill>
+                <a:schemeClr val="tx1"/>
+              </a:solidFill>
+            </a:ln>
+          </p:spPr>
+          <p:style>
+            <a:lnRef idx="2">
+              <a:schemeClr val="accent1">
+                <a:shade val="50000"/>
+              </a:schemeClr>
+            </a:lnRef>
+            <a:fillRef idx="1">
+              <a:schemeClr val="accent1"/>
+            </a:fillRef>
+            <a:effectRef idx="0">
+              <a:schemeClr val="accent1"/>
+            </a:effectRef>
+            <a:fontRef idx="minor">
+              <a:schemeClr val="lt1"/>
+            </a:fontRef>
+          </p:style>
+          <p:txBody>
+            <a:bodyPr rtlCol="0" anchor="ctr"/>
+            <a:lstStyle/>
+            <a:p>
+              <a:pPr algn="ctr"/>
+              <a:r>
+                <a:rPr lang="zh-CN" altLang="en-US" sz="1200" dirty="0">
+                  <a:solidFill>
+                    <a:schemeClr val="tx1"/>
+                  </a:solidFill>
+                  <a:latin typeface="宋体" panose="02010600030101010101" pitchFamily="2" charset="-122"/>
+                  <a:ea typeface="宋体" panose="02010600030101010101" pitchFamily="2" charset="-122"/>
+                </a:rPr>
+                <a:t>用户信息管理</a:t>
+              </a:r>
+            </a:p>
+          </p:txBody>
+        </p:sp>
+        <p:sp>
+          <p:nvSpPr>
+            <p:cNvPr id="31" name="矩形 30">
+              <a:extLst>
+                <a:ext uri="{FF2B5EF4-FFF2-40B4-BE49-F238E27FC236}">
+                  <a16:creationId xmlns:a16="http://schemas.microsoft.com/office/drawing/2014/main" id="{692D77D7-FCE6-4FFA-BBA1-A9B052D76F6D}"/>
+                </a:ext>
+              </a:extLst>
+            </p:cNvPr>
+            <p:cNvSpPr/>
+            <p:nvPr/>
+          </p:nvSpPr>
+          <p:spPr>
+            <a:xfrm>
+              <a:off x="2313134" y="2609380"/>
+              <a:ext cx="1123281" cy="285750"/>
+            </a:xfrm>
+            <a:prstGeom prst="rect">
+              <a:avLst/>
+            </a:prstGeom>
+            <a:noFill/>
+            <a:ln>
+              <a:solidFill>
+                <a:schemeClr val="tx1"/>
+              </a:solidFill>
+            </a:ln>
+          </p:spPr>
+          <p:style>
+            <a:lnRef idx="2">
+              <a:schemeClr val="accent1">
+                <a:shade val="50000"/>
+              </a:schemeClr>
+            </a:lnRef>
+            <a:fillRef idx="1">
+              <a:schemeClr val="accent1"/>
+            </a:fillRef>
+            <a:effectRef idx="0">
+              <a:schemeClr val="accent1"/>
+            </a:effectRef>
+            <a:fontRef idx="minor">
+              <a:schemeClr val="lt1"/>
+            </a:fontRef>
+          </p:style>
+          <p:txBody>
+            <a:bodyPr rtlCol="0" anchor="ctr"/>
+            <a:lstStyle/>
+            <a:p>
+              <a:pPr algn="ctr"/>
+              <a:r>
+                <a:rPr lang="zh-CN" altLang="en-US" sz="1200" dirty="0">
+                  <a:solidFill>
+                    <a:schemeClr val="tx1"/>
+                  </a:solidFill>
+                  <a:latin typeface="宋体" panose="02010600030101010101" pitchFamily="2" charset="-122"/>
+                  <a:ea typeface="宋体" panose="02010600030101010101" pitchFamily="2" charset="-122"/>
+                </a:rPr>
+                <a:t>流量统计</a:t>
+              </a:r>
+            </a:p>
+          </p:txBody>
+        </p:sp>
+        <p:sp>
+          <p:nvSpPr>
+            <p:cNvPr id="32" name="矩形 31">
+              <a:extLst>
+                <a:ext uri="{FF2B5EF4-FFF2-40B4-BE49-F238E27FC236}">
+                  <a16:creationId xmlns:a16="http://schemas.microsoft.com/office/drawing/2014/main" id="{196C3268-8267-4A9D-B4E2-6BA8AAC170AF}"/>
+                </a:ext>
+              </a:extLst>
+            </p:cNvPr>
+            <p:cNvSpPr/>
+            <p:nvPr/>
+          </p:nvSpPr>
+          <p:spPr>
+            <a:xfrm>
+              <a:off x="3752943" y="2034881"/>
+              <a:ext cx="795765" cy="285750"/>
+            </a:xfrm>
+            <a:prstGeom prst="rect">
+              <a:avLst/>
+            </a:prstGeom>
+            <a:noFill/>
+            <a:ln>
+              <a:solidFill>
+                <a:schemeClr val="tx1"/>
+              </a:solidFill>
+            </a:ln>
+          </p:spPr>
+          <p:style>
+            <a:lnRef idx="2">
+              <a:schemeClr val="accent1">
+                <a:shade val="50000"/>
+              </a:schemeClr>
+            </a:lnRef>
+            <a:fillRef idx="1">
+              <a:schemeClr val="accent1"/>
+            </a:fillRef>
+            <a:effectRef idx="0">
+              <a:schemeClr val="accent1"/>
+            </a:effectRef>
+            <a:fontRef idx="minor">
+              <a:schemeClr val="lt1"/>
+            </a:fontRef>
+          </p:style>
+          <p:txBody>
+            <a:bodyPr rtlCol="0" anchor="ctr"/>
+            <a:lstStyle/>
+            <a:p>
+              <a:pPr algn="ctr"/>
+              <a:r>
+                <a:rPr lang="zh-CN" altLang="en-US" sz="1200" dirty="0">
+                  <a:solidFill>
+                    <a:schemeClr val="tx1"/>
+                  </a:solidFill>
+                  <a:latin typeface="宋体" panose="02010600030101010101" pitchFamily="2" charset="-122"/>
+                  <a:ea typeface="宋体" panose="02010600030101010101" pitchFamily="2" charset="-122"/>
+                </a:rPr>
+                <a:t>流量管理</a:t>
+              </a:r>
+            </a:p>
+          </p:txBody>
+        </p:sp>
+        <p:sp>
+          <p:nvSpPr>
+            <p:cNvPr id="33" name="矩形 32">
+              <a:extLst>
+                <a:ext uri="{FF2B5EF4-FFF2-40B4-BE49-F238E27FC236}">
+                  <a16:creationId xmlns:a16="http://schemas.microsoft.com/office/drawing/2014/main" id="{745CCF8A-2F17-4681-B711-711C16034D7F}"/>
+                </a:ext>
+              </a:extLst>
+            </p:cNvPr>
+            <p:cNvSpPr/>
+            <p:nvPr/>
+          </p:nvSpPr>
+          <p:spPr>
+            <a:xfrm>
+              <a:off x="3752943" y="2601231"/>
+              <a:ext cx="795765" cy="285750"/>
+            </a:xfrm>
+            <a:prstGeom prst="rect">
+              <a:avLst/>
+            </a:prstGeom>
+            <a:noFill/>
+            <a:ln>
+              <a:solidFill>
+                <a:schemeClr val="tx1"/>
+              </a:solidFill>
+            </a:ln>
+          </p:spPr>
+          <p:style>
+            <a:lnRef idx="2">
+              <a:schemeClr val="accent1">
+                <a:shade val="50000"/>
+              </a:schemeClr>
+            </a:lnRef>
+            <a:fillRef idx="1">
+              <a:schemeClr val="accent1"/>
+            </a:fillRef>
+            <a:effectRef idx="0">
+              <a:schemeClr val="accent1"/>
+            </a:effectRef>
+            <a:fontRef idx="minor">
+              <a:schemeClr val="lt1"/>
+            </a:fontRef>
+          </p:style>
+          <p:txBody>
+            <a:bodyPr rtlCol="0" anchor="ctr"/>
+            <a:lstStyle/>
+            <a:p>
+              <a:pPr algn="ctr"/>
+              <a:r>
+                <a:rPr lang="zh-CN" altLang="en-US" sz="1200" dirty="0">
+                  <a:solidFill>
+                    <a:schemeClr val="tx1"/>
+                  </a:solidFill>
+                  <a:latin typeface="宋体" panose="02010600030101010101" pitchFamily="2" charset="-122"/>
+                  <a:ea typeface="宋体" panose="02010600030101010101" pitchFamily="2" charset="-122"/>
+                </a:rPr>
+                <a:t>流量查询</a:t>
+              </a:r>
+            </a:p>
+          </p:txBody>
+        </p:sp>
+        <p:grpSp>
+          <p:nvGrpSpPr>
+            <p:cNvPr id="40" name="组合 39">
+              <a:extLst>
+                <a:ext uri="{FF2B5EF4-FFF2-40B4-BE49-F238E27FC236}">
+                  <a16:creationId xmlns:a16="http://schemas.microsoft.com/office/drawing/2014/main" id="{4C13F0C1-611B-48E7-9349-8EE193CE2718}"/>
+                </a:ext>
+              </a:extLst>
+            </p:cNvPr>
+            <p:cNvGrpSpPr/>
+            <p:nvPr/>
+          </p:nvGrpSpPr>
+          <p:grpSpPr>
+            <a:xfrm>
+              <a:off x="185736" y="3943865"/>
+              <a:ext cx="5133976" cy="584891"/>
+              <a:chOff x="6980199" y="5834959"/>
+              <a:chExt cx="5133976" cy="584891"/>
+            </a:xfrm>
+          </p:grpSpPr>
+          <p:sp>
+            <p:nvSpPr>
+              <p:cNvPr id="34" name="矩形 33">
+                <a:extLst>
+                  <a:ext uri="{FF2B5EF4-FFF2-40B4-BE49-F238E27FC236}">
+                    <a16:creationId xmlns:a16="http://schemas.microsoft.com/office/drawing/2014/main" id="{538C7C6E-853E-4E38-8637-7CE1EDAE3591}"/>
+                  </a:ext>
+                </a:extLst>
+              </p:cNvPr>
+              <p:cNvSpPr/>
+              <p:nvPr/>
+            </p:nvSpPr>
+            <p:spPr>
+              <a:xfrm>
+                <a:off x="6980199" y="5834959"/>
+                <a:ext cx="5133976" cy="584891"/>
+              </a:xfrm>
+              <a:prstGeom prst="rect">
+                <a:avLst/>
+              </a:prstGeom>
+              <a:solidFill>
+                <a:srgbClr val="D3D3F6"/>
+              </a:solidFill>
+              <a:ln>
+                <a:noFill/>
+              </a:ln>
+            </p:spPr>
+            <p:style>
+              <a:lnRef idx="2">
+                <a:schemeClr val="accent1">
+                  <a:shade val="50000"/>
+                </a:schemeClr>
+              </a:lnRef>
+              <a:fillRef idx="1">
+                <a:schemeClr val="accent1"/>
+              </a:fillRef>
+              <a:effectRef idx="0">
+                <a:schemeClr val="accent1"/>
+              </a:effectRef>
+              <a:fontRef idx="minor">
+                <a:schemeClr val="lt1"/>
+              </a:fontRef>
+            </p:style>
+            <p:txBody>
+              <a:bodyPr rtlCol="0" anchor="ctr"/>
+              <a:lstStyle/>
+              <a:p>
+                <a:pPr algn="ctr"/>
+                <a:endParaRPr lang="zh-CN" altLang="en-US" dirty="0"/>
+              </a:p>
+            </p:txBody>
+          </p:sp>
+          <p:sp>
+            <p:nvSpPr>
+              <p:cNvPr id="35" name="文本框 34">
+                <a:extLst>
+                  <a:ext uri="{FF2B5EF4-FFF2-40B4-BE49-F238E27FC236}">
+                    <a16:creationId xmlns:a16="http://schemas.microsoft.com/office/drawing/2014/main" id="{00D62D96-7059-46EB-948B-7C8F6F96F91D}"/>
+                  </a:ext>
+                </a:extLst>
+              </p:cNvPr>
+              <p:cNvSpPr txBox="1"/>
+              <p:nvPr/>
+            </p:nvSpPr>
+            <p:spPr>
+              <a:xfrm>
+                <a:off x="6980199" y="5982210"/>
+                <a:ext cx="646331" cy="276999"/>
+              </a:xfrm>
+              <a:prstGeom prst="rect">
+                <a:avLst/>
+              </a:prstGeom>
+              <a:noFill/>
+            </p:spPr>
+            <p:txBody>
+              <a:bodyPr wrap="none" rtlCol="0">
+                <a:spAutoFit/>
+              </a:bodyPr>
+              <a:lstStyle/>
+              <a:p>
+                <a:r>
+                  <a:rPr lang="zh-CN" altLang="en-US" sz="1200" dirty="0">
+                    <a:latin typeface="宋体" panose="02010600030101010101" pitchFamily="2" charset="-122"/>
+                    <a:ea typeface="宋体" panose="02010600030101010101" pitchFamily="2" charset="-122"/>
+                  </a:rPr>
+                  <a:t>数据层</a:t>
+                </a:r>
+              </a:p>
+            </p:txBody>
+          </p:sp>
+          <p:sp>
+            <p:nvSpPr>
+              <p:cNvPr id="36" name="矩形 35">
+                <a:extLst>
+                  <a:ext uri="{FF2B5EF4-FFF2-40B4-BE49-F238E27FC236}">
+                    <a16:creationId xmlns:a16="http://schemas.microsoft.com/office/drawing/2014/main" id="{5245BC36-6E7F-4A51-A04A-D136E5049975}"/>
+                  </a:ext>
+                </a:extLst>
+              </p:cNvPr>
+              <p:cNvSpPr/>
+              <p:nvPr/>
+            </p:nvSpPr>
+            <p:spPr>
+              <a:xfrm>
+                <a:off x="7662947" y="5977833"/>
+                <a:ext cx="707009" cy="285750"/>
+              </a:xfrm>
+              <a:prstGeom prst="rect">
+                <a:avLst/>
+              </a:prstGeom>
+              <a:noFill/>
+              <a:ln>
+                <a:solidFill>
+                  <a:schemeClr val="tx1"/>
+                </a:solidFill>
+              </a:ln>
+            </p:spPr>
+            <p:style>
+              <a:lnRef idx="2">
+                <a:schemeClr val="accent1">
+                  <a:shade val="50000"/>
+                </a:schemeClr>
+              </a:lnRef>
+              <a:fillRef idx="1">
+                <a:schemeClr val="accent1"/>
+              </a:fillRef>
+              <a:effectRef idx="0">
+                <a:schemeClr val="accent1"/>
+              </a:effectRef>
+              <a:fontRef idx="minor">
+                <a:schemeClr val="lt1"/>
+              </a:fontRef>
+            </p:style>
+            <p:txBody>
+              <a:bodyPr rtlCol="0" anchor="ctr"/>
+              <a:lstStyle/>
+              <a:p>
+                <a:pPr algn="ctr"/>
+                <a:r>
+                  <a:rPr lang="zh-CN" altLang="en-US" sz="1200" dirty="0">
+                    <a:solidFill>
+                      <a:schemeClr val="tx1"/>
+                    </a:solidFill>
+                    <a:latin typeface="宋体" panose="02010600030101010101" pitchFamily="2" charset="-122"/>
+                    <a:ea typeface="宋体" panose="02010600030101010101" pitchFamily="2" charset="-122"/>
+                  </a:rPr>
+                  <a:t>事务</a:t>
+                </a:r>
+              </a:p>
+            </p:txBody>
+          </p:sp>
+          <p:sp>
+            <p:nvSpPr>
+              <p:cNvPr id="37" name="矩形 36">
+                <a:extLst>
+                  <a:ext uri="{FF2B5EF4-FFF2-40B4-BE49-F238E27FC236}">
+                    <a16:creationId xmlns:a16="http://schemas.microsoft.com/office/drawing/2014/main" id="{F64BEEEA-E84A-4E2B-A673-8AFE30AF4317}"/>
+                  </a:ext>
+                </a:extLst>
+              </p:cNvPr>
+              <p:cNvSpPr/>
+              <p:nvPr/>
+            </p:nvSpPr>
+            <p:spPr>
+              <a:xfrm>
+                <a:off x="8533651" y="5977833"/>
+                <a:ext cx="954752" cy="285750"/>
+              </a:xfrm>
+              <a:prstGeom prst="rect">
+                <a:avLst/>
+              </a:prstGeom>
+              <a:noFill/>
+              <a:ln>
+                <a:solidFill>
+                  <a:schemeClr val="tx1"/>
+                </a:solidFill>
+              </a:ln>
+            </p:spPr>
+            <p:style>
+              <a:lnRef idx="2">
+                <a:schemeClr val="accent1">
+                  <a:shade val="50000"/>
+                </a:schemeClr>
+              </a:lnRef>
+              <a:fillRef idx="1">
+                <a:schemeClr val="accent1"/>
+              </a:fillRef>
+              <a:effectRef idx="0">
+                <a:schemeClr val="accent1"/>
+              </a:effectRef>
+              <a:fontRef idx="minor">
+                <a:schemeClr val="lt1"/>
+              </a:fontRef>
+            </p:style>
+            <p:txBody>
+              <a:bodyPr rtlCol="0" anchor="ctr"/>
+              <a:lstStyle/>
+              <a:p>
+                <a:pPr algn="ctr"/>
+                <a:r>
+                  <a:rPr lang="zh-CN" altLang="en-US" sz="1200" dirty="0">
+                    <a:solidFill>
+                      <a:schemeClr val="tx1"/>
+                    </a:solidFill>
+                    <a:latin typeface="宋体" panose="02010600030101010101" pitchFamily="2" charset="-122"/>
+                    <a:ea typeface="宋体" panose="02010600030101010101" pitchFamily="2" charset="-122"/>
+                  </a:rPr>
+                  <a:t>读写数据库</a:t>
+                </a:r>
+              </a:p>
+            </p:txBody>
+          </p:sp>
+          <p:sp>
+            <p:nvSpPr>
+              <p:cNvPr id="38" name="矩形 37">
+                <a:extLst>
+                  <a:ext uri="{FF2B5EF4-FFF2-40B4-BE49-F238E27FC236}">
+                    <a16:creationId xmlns:a16="http://schemas.microsoft.com/office/drawing/2014/main" id="{35731CFF-17C0-411E-AEFF-BA3F62F8930E}"/>
+                  </a:ext>
+                </a:extLst>
+              </p:cNvPr>
+              <p:cNvSpPr/>
+              <p:nvPr/>
+            </p:nvSpPr>
+            <p:spPr>
+              <a:xfrm>
+                <a:off x="9652098" y="5977833"/>
+                <a:ext cx="1241370" cy="285750"/>
+              </a:xfrm>
+              <a:prstGeom prst="rect">
+                <a:avLst/>
+              </a:prstGeom>
+              <a:noFill/>
+              <a:ln>
+                <a:solidFill>
+                  <a:schemeClr val="tx1"/>
+                </a:solidFill>
+              </a:ln>
+            </p:spPr>
+            <p:style>
+              <a:lnRef idx="2">
+                <a:schemeClr val="accent1">
+                  <a:shade val="50000"/>
+                </a:schemeClr>
+              </a:lnRef>
+              <a:fillRef idx="1">
+                <a:schemeClr val="accent1"/>
+              </a:fillRef>
+              <a:effectRef idx="0">
+                <a:schemeClr val="accent1"/>
+              </a:effectRef>
+              <a:fontRef idx="minor">
+                <a:schemeClr val="lt1"/>
+              </a:fontRef>
+            </p:style>
+            <p:txBody>
+              <a:bodyPr rtlCol="0" anchor="ctr"/>
+              <a:lstStyle/>
+              <a:p>
+                <a:pPr algn="ctr"/>
+                <a:r>
+                  <a:rPr lang="en-US" altLang="zh-CN" sz="1200" dirty="0">
+                    <a:solidFill>
+                      <a:schemeClr val="tx1"/>
+                    </a:solidFill>
+                    <a:latin typeface="宋体" panose="02010600030101010101" pitchFamily="2" charset="-122"/>
+                    <a:ea typeface="宋体" panose="02010600030101010101" pitchFamily="2" charset="-122"/>
+                  </a:rPr>
+                  <a:t>ElasticSearch</a:t>
+                </a:r>
+                <a:endParaRPr lang="zh-CN" altLang="en-US" sz="1200" dirty="0">
+                  <a:solidFill>
+                    <a:schemeClr val="tx1"/>
+                  </a:solidFill>
+                  <a:latin typeface="宋体" panose="02010600030101010101" pitchFamily="2" charset="-122"/>
+                  <a:ea typeface="宋体" panose="02010600030101010101" pitchFamily="2" charset="-122"/>
+                </a:endParaRPr>
+              </a:p>
+            </p:txBody>
+          </p:sp>
+          <p:sp>
+            <p:nvSpPr>
+              <p:cNvPr id="39" name="矩形 38">
+                <a:extLst>
+                  <a:ext uri="{FF2B5EF4-FFF2-40B4-BE49-F238E27FC236}">
+                    <a16:creationId xmlns:a16="http://schemas.microsoft.com/office/drawing/2014/main" id="{32492EFE-7271-499F-BEF3-00044AF85B1D}"/>
+                  </a:ext>
+                </a:extLst>
+              </p:cNvPr>
+              <p:cNvSpPr/>
+              <p:nvPr/>
+            </p:nvSpPr>
+            <p:spPr>
+              <a:xfrm>
+                <a:off x="11057163" y="5977833"/>
+                <a:ext cx="945443" cy="285750"/>
+              </a:xfrm>
+              <a:prstGeom prst="rect">
+                <a:avLst/>
+              </a:prstGeom>
+              <a:noFill/>
+              <a:ln>
+                <a:solidFill>
+                  <a:schemeClr val="tx1"/>
+                </a:solidFill>
+              </a:ln>
+            </p:spPr>
+            <p:style>
+              <a:lnRef idx="2">
+                <a:schemeClr val="accent1">
+                  <a:shade val="50000"/>
+                </a:schemeClr>
+              </a:lnRef>
+              <a:fillRef idx="1">
+                <a:schemeClr val="accent1"/>
+              </a:fillRef>
+              <a:effectRef idx="0">
+                <a:schemeClr val="accent1"/>
+              </a:effectRef>
+              <a:fontRef idx="minor">
+                <a:schemeClr val="lt1"/>
+              </a:fontRef>
+            </p:style>
+            <p:txBody>
+              <a:bodyPr rtlCol="0" anchor="ctr"/>
+              <a:lstStyle/>
+              <a:p>
+                <a:pPr algn="ctr"/>
+                <a:r>
+                  <a:rPr lang="en-US" altLang="zh-CN" sz="1200" dirty="0">
+                    <a:solidFill>
+                      <a:schemeClr val="tx1"/>
+                    </a:solidFill>
+                    <a:latin typeface="宋体" panose="02010600030101010101" pitchFamily="2" charset="-122"/>
+                    <a:ea typeface="宋体" panose="02010600030101010101" pitchFamily="2" charset="-122"/>
+                  </a:rPr>
+                  <a:t>Kafka</a:t>
+                </a:r>
+                <a:r>
+                  <a:rPr lang="zh-CN" altLang="en-US" sz="1200" dirty="0">
+                    <a:solidFill>
+                      <a:schemeClr val="tx1"/>
+                    </a:solidFill>
+                    <a:latin typeface="宋体" panose="02010600030101010101" pitchFamily="2" charset="-122"/>
+                    <a:ea typeface="宋体" panose="02010600030101010101" pitchFamily="2" charset="-122"/>
+                  </a:rPr>
+                  <a:t>集群</a:t>
+                </a:r>
+              </a:p>
+            </p:txBody>
+          </p:sp>
+        </p:grpSp>
+        <p:sp>
+          <p:nvSpPr>
+            <p:cNvPr id="41" name="矩形 40">
+              <a:extLst>
+                <a:ext uri="{FF2B5EF4-FFF2-40B4-BE49-F238E27FC236}">
+                  <a16:creationId xmlns:a16="http://schemas.microsoft.com/office/drawing/2014/main" id="{4127CC8B-3703-468B-86C7-2BF591F45D3E}"/>
+                </a:ext>
+              </a:extLst>
+            </p:cNvPr>
+            <p:cNvSpPr/>
+            <p:nvPr/>
+          </p:nvSpPr>
+          <p:spPr>
+            <a:xfrm>
+              <a:off x="183265" y="3158349"/>
+              <a:ext cx="5138918" cy="589350"/>
+            </a:xfrm>
+            <a:prstGeom prst="rect">
+              <a:avLst/>
+            </a:prstGeom>
+            <a:solidFill>
+              <a:srgbClr val="FFCCCC"/>
+            </a:solidFill>
+            <a:ln>
+              <a:noFill/>
+            </a:ln>
+          </p:spPr>
+          <p:style>
+            <a:lnRef idx="2">
+              <a:schemeClr val="accent1">
+                <a:shade val="50000"/>
+              </a:schemeClr>
+            </a:lnRef>
+            <a:fillRef idx="1">
+              <a:schemeClr val="accent1"/>
+            </a:fillRef>
+            <a:effectRef idx="0">
+              <a:schemeClr val="accent1"/>
+            </a:effectRef>
+            <a:fontRef idx="minor">
+              <a:schemeClr val="lt1"/>
+            </a:fontRef>
+          </p:style>
+          <p:txBody>
+            <a:bodyPr rtlCol="0" anchor="ctr"/>
+            <a:lstStyle/>
+            <a:p>
+              <a:pPr algn="ctr"/>
+              <a:endParaRPr lang="zh-CN" altLang="en-US"/>
+            </a:p>
+          </p:txBody>
+        </p:sp>
+        <p:sp>
+          <p:nvSpPr>
+            <p:cNvPr id="42" name="文本框 41">
+              <a:extLst>
+                <a:ext uri="{FF2B5EF4-FFF2-40B4-BE49-F238E27FC236}">
+                  <a16:creationId xmlns:a16="http://schemas.microsoft.com/office/drawing/2014/main" id="{C0709153-77A3-4DB6-857C-38E301A9E58C}"/>
+                </a:ext>
+              </a:extLst>
+            </p:cNvPr>
+            <p:cNvSpPr txBox="1"/>
+            <p:nvPr/>
+          </p:nvSpPr>
+          <p:spPr>
+            <a:xfrm>
+              <a:off x="180793" y="3286084"/>
+              <a:ext cx="954107" cy="276999"/>
+            </a:xfrm>
+            <a:prstGeom prst="rect">
+              <a:avLst/>
+            </a:prstGeom>
+            <a:noFill/>
+          </p:spPr>
+          <p:txBody>
+            <a:bodyPr wrap="none" rtlCol="0">
+              <a:spAutoFit/>
+            </a:bodyPr>
+            <a:lstStyle/>
+            <a:p>
+              <a:r>
+                <a:rPr lang="zh-CN" altLang="en-US" sz="1200" dirty="0">
+                  <a:latin typeface="宋体" panose="02010600030101010101" pitchFamily="2" charset="-122"/>
+                  <a:ea typeface="宋体" panose="02010600030101010101" pitchFamily="2" charset="-122"/>
+                </a:rPr>
+                <a:t>分析检测层</a:t>
+              </a:r>
+            </a:p>
+          </p:txBody>
+        </p:sp>
+        <p:sp>
+          <p:nvSpPr>
+            <p:cNvPr id="43" name="矩形 42">
+              <a:extLst>
+                <a:ext uri="{FF2B5EF4-FFF2-40B4-BE49-F238E27FC236}">
+                  <a16:creationId xmlns:a16="http://schemas.microsoft.com/office/drawing/2014/main" id="{23B3B5B7-84A8-44C9-84A6-92917F96F06A}"/>
+                </a:ext>
+              </a:extLst>
+            </p:cNvPr>
+            <p:cNvSpPr/>
+            <p:nvPr/>
+          </p:nvSpPr>
+          <p:spPr>
+            <a:xfrm>
+              <a:off x="1134900" y="3281708"/>
+              <a:ext cx="964035" cy="285750"/>
+            </a:xfrm>
+            <a:prstGeom prst="rect">
+              <a:avLst/>
+            </a:prstGeom>
+            <a:noFill/>
+            <a:ln>
+              <a:solidFill>
+                <a:schemeClr val="tx1"/>
+              </a:solidFill>
+            </a:ln>
+          </p:spPr>
+          <p:style>
+            <a:lnRef idx="2">
+              <a:schemeClr val="accent1">
+                <a:shade val="50000"/>
+              </a:schemeClr>
+            </a:lnRef>
+            <a:fillRef idx="1">
+              <a:schemeClr val="accent1"/>
+            </a:fillRef>
+            <a:effectRef idx="0">
+              <a:schemeClr val="accent1"/>
+            </a:effectRef>
+            <a:fontRef idx="minor">
+              <a:schemeClr val="lt1"/>
+            </a:fontRef>
+          </p:style>
+          <p:txBody>
+            <a:bodyPr rtlCol="0" anchor="ctr"/>
+            <a:lstStyle/>
+            <a:p>
+              <a:pPr algn="ctr"/>
+              <a:r>
+                <a:rPr lang="zh-CN" altLang="en-US" sz="1200" dirty="0">
+                  <a:solidFill>
+                    <a:schemeClr val="tx1"/>
+                  </a:solidFill>
+                  <a:latin typeface="宋体" panose="02010600030101010101" pitchFamily="2" charset="-122"/>
+                  <a:ea typeface="宋体" panose="02010600030101010101" pitchFamily="2" charset="-122"/>
+                </a:rPr>
+                <a:t>数据预处理</a:t>
+              </a:r>
+            </a:p>
+          </p:txBody>
+        </p:sp>
+        <p:sp>
+          <p:nvSpPr>
+            <p:cNvPr id="44" name="矩形 43">
+              <a:extLst>
+                <a:ext uri="{FF2B5EF4-FFF2-40B4-BE49-F238E27FC236}">
+                  <a16:creationId xmlns:a16="http://schemas.microsoft.com/office/drawing/2014/main" id="{BE8BF990-D497-4595-A0DF-DBE69B1DDC13}"/>
+                </a:ext>
+              </a:extLst>
+            </p:cNvPr>
+            <p:cNvSpPr/>
+            <p:nvPr/>
+          </p:nvSpPr>
+          <p:spPr>
+            <a:xfrm>
+              <a:off x="2329995" y="3281708"/>
+              <a:ext cx="1073278" cy="285750"/>
             </a:xfrm>
             <a:prstGeom prst="rect">
               <a:avLst/>
@@ -4332,7 +4643,7 @@
                   <a:latin typeface="宋体" panose="02010600030101010101" pitchFamily="2" charset="-122"/>
                   <a:ea typeface="宋体" panose="02010600030101010101" pitchFamily="2" charset="-122"/>
                 </a:rPr>
-                <a:t>ElasticSearch</a:t>
+                <a:t>IED-WPAT</a:t>
               </a:r>
               <a:endParaRPr lang="zh-CN" altLang="en-US" sz="1200" dirty="0">
                 <a:solidFill>
@@ -4346,10 +4657,10 @@
         </p:sp>
         <p:sp>
           <p:nvSpPr>
-            <p:cNvPr id="39" name="矩形 38">
+            <p:cNvPr id="45" name="矩形 44">
               <a:extLst>
                 <a:ext uri="{FF2B5EF4-FFF2-40B4-BE49-F238E27FC236}">
-                  <a16:creationId xmlns:a16="http://schemas.microsoft.com/office/drawing/2014/main" id="{32492EFE-7271-499F-BEF3-00044AF85B1D}"/>
+                  <a16:creationId xmlns:a16="http://schemas.microsoft.com/office/drawing/2014/main" id="{230092A4-761B-4590-9076-6E8D006AF21F}"/>
                 </a:ext>
               </a:extLst>
             </p:cNvPr>
@@ -4358,8 +4669,8 @@
           </p:nvSpPr>
           <p:spPr>
             <a:xfrm>
-              <a:off x="11057163" y="5977833"/>
-              <a:ext cx="945443" cy="285750"/>
+              <a:off x="3559897" y="3285775"/>
+              <a:ext cx="1492779" cy="285750"/>
             </a:xfrm>
             <a:prstGeom prst="rect">
               <a:avLst/>
@@ -4400,7 +4711,7 @@
                   <a:latin typeface="宋体" panose="02010600030101010101" pitchFamily="2" charset="-122"/>
                   <a:ea typeface="宋体" panose="02010600030101010101" pitchFamily="2" charset="-122"/>
                 </a:rPr>
-                <a:t>Kafka</a:t>
+                <a:t>MaskTST</a:t>
               </a:r>
               <a:r>
                 <a:rPr lang="zh-CN" altLang="en-US" sz="1200" dirty="0">
@@ -4410,1061 +4721,771 @@
                   <a:latin typeface="宋体" panose="02010600030101010101" pitchFamily="2" charset="-122"/>
                   <a:ea typeface="宋体" panose="02010600030101010101" pitchFamily="2" charset="-122"/>
                 </a:rPr>
-                <a:t>集群</a:t>
+                <a:t>多中心聚类</a:t>
+              </a:r>
+            </a:p>
+          </p:txBody>
+        </p:sp>
+        <p:sp>
+          <p:nvSpPr>
+            <p:cNvPr id="46" name="矩形 45">
+              <a:extLst>
+                <a:ext uri="{FF2B5EF4-FFF2-40B4-BE49-F238E27FC236}">
+                  <a16:creationId xmlns:a16="http://schemas.microsoft.com/office/drawing/2014/main" id="{B2C69848-562B-40F9-82E6-83341736773A}"/>
+                </a:ext>
+              </a:extLst>
+            </p:cNvPr>
+            <p:cNvSpPr/>
+            <p:nvPr/>
+          </p:nvSpPr>
+          <p:spPr>
+            <a:xfrm>
+              <a:off x="185735" y="4809533"/>
+              <a:ext cx="6108700" cy="881495"/>
+            </a:xfrm>
+            <a:prstGeom prst="rect">
+              <a:avLst/>
+            </a:prstGeom>
+            <a:solidFill>
+              <a:srgbClr val="FADDEC"/>
+            </a:solidFill>
+            <a:ln>
+              <a:noFill/>
+            </a:ln>
+          </p:spPr>
+          <p:style>
+            <a:lnRef idx="2">
+              <a:schemeClr val="accent1">
+                <a:shade val="50000"/>
+              </a:schemeClr>
+            </a:lnRef>
+            <a:fillRef idx="1">
+              <a:schemeClr val="accent1"/>
+            </a:fillRef>
+            <a:effectRef idx="0">
+              <a:schemeClr val="accent1"/>
+            </a:effectRef>
+            <a:fontRef idx="minor">
+              <a:schemeClr val="lt1"/>
+            </a:fontRef>
+          </p:style>
+          <p:txBody>
+            <a:bodyPr rtlCol="0" anchor="ctr"/>
+            <a:lstStyle/>
+            <a:p>
+              <a:pPr algn="ctr"/>
+              <a:endParaRPr lang="zh-CN" altLang="en-US"/>
+            </a:p>
+          </p:txBody>
+        </p:sp>
+        <p:sp>
+          <p:nvSpPr>
+            <p:cNvPr id="47" name="文本框 46">
+              <a:extLst>
+                <a:ext uri="{FF2B5EF4-FFF2-40B4-BE49-F238E27FC236}">
+                  <a16:creationId xmlns:a16="http://schemas.microsoft.com/office/drawing/2014/main" id="{CB98F292-5626-43A7-8DBC-D0FD28D4CB87}"/>
+                </a:ext>
+              </a:extLst>
+            </p:cNvPr>
+            <p:cNvSpPr txBox="1"/>
+            <p:nvPr/>
+          </p:nvSpPr>
+          <p:spPr>
+            <a:xfrm>
+              <a:off x="180792" y="5067634"/>
+              <a:ext cx="646331" cy="276999"/>
+            </a:xfrm>
+            <a:prstGeom prst="rect">
+              <a:avLst/>
+            </a:prstGeom>
+            <a:noFill/>
+          </p:spPr>
+          <p:txBody>
+            <a:bodyPr wrap="none" rtlCol="0">
+              <a:spAutoFit/>
+            </a:bodyPr>
+            <a:lstStyle/>
+            <a:p>
+              <a:r>
+                <a:rPr lang="zh-CN" altLang="en-US" sz="1200" dirty="0">
+                  <a:latin typeface="宋体" panose="02010600030101010101" pitchFamily="2" charset="-122"/>
+                  <a:ea typeface="宋体" panose="02010600030101010101" pitchFamily="2" charset="-122"/>
+                </a:rPr>
+                <a:t>数据库</a:t>
+              </a:r>
+            </a:p>
+          </p:txBody>
+        </p:sp>
+        <p:sp>
+          <p:nvSpPr>
+            <p:cNvPr id="48" name="流程图: 磁盘 47">
+              <a:extLst>
+                <a:ext uri="{FF2B5EF4-FFF2-40B4-BE49-F238E27FC236}">
+                  <a16:creationId xmlns:a16="http://schemas.microsoft.com/office/drawing/2014/main" id="{A22EAEFD-84A7-4949-AEC8-29D37A127CC2}"/>
+                </a:ext>
+              </a:extLst>
+            </p:cNvPr>
+            <p:cNvSpPr/>
+            <p:nvPr/>
+          </p:nvSpPr>
+          <p:spPr>
+            <a:xfrm>
+              <a:off x="1695521" y="4925894"/>
+              <a:ext cx="914400" cy="612648"/>
+            </a:xfrm>
+            <a:prstGeom prst="flowChartMagneticDisk">
+              <a:avLst/>
+            </a:prstGeom>
+            <a:solidFill>
+              <a:schemeClr val="bg1"/>
+            </a:solidFill>
+            <a:ln>
+              <a:solidFill>
+                <a:schemeClr val="tx1"/>
+              </a:solidFill>
+            </a:ln>
+          </p:spPr>
+          <p:style>
+            <a:lnRef idx="2">
+              <a:schemeClr val="accent1">
+                <a:shade val="50000"/>
+              </a:schemeClr>
+            </a:lnRef>
+            <a:fillRef idx="1">
+              <a:schemeClr val="accent1"/>
+            </a:fillRef>
+            <a:effectRef idx="0">
+              <a:schemeClr val="accent1"/>
+            </a:effectRef>
+            <a:fontRef idx="minor">
+              <a:schemeClr val="lt1"/>
+            </a:fontRef>
+          </p:style>
+          <p:txBody>
+            <a:bodyPr rtlCol="0" anchor="ctr"/>
+            <a:lstStyle/>
+            <a:p>
+              <a:pPr algn="ctr"/>
+              <a:endParaRPr lang="zh-CN" altLang="en-US"/>
+            </a:p>
+          </p:txBody>
+        </p:sp>
+        <p:sp>
+          <p:nvSpPr>
+            <p:cNvPr id="49" name="流程图: 磁盘 48">
+              <a:extLst>
+                <a:ext uri="{FF2B5EF4-FFF2-40B4-BE49-F238E27FC236}">
+                  <a16:creationId xmlns:a16="http://schemas.microsoft.com/office/drawing/2014/main" id="{722D832C-E61B-4ACB-B5C3-94BE8F6473A4}"/>
+                </a:ext>
+              </a:extLst>
+            </p:cNvPr>
+            <p:cNvSpPr/>
+            <p:nvPr/>
+          </p:nvSpPr>
+          <p:spPr>
+            <a:xfrm>
+              <a:off x="3478320" y="4943956"/>
+              <a:ext cx="914400" cy="612648"/>
+            </a:xfrm>
+            <a:prstGeom prst="flowChartMagneticDisk">
+              <a:avLst/>
+            </a:prstGeom>
+            <a:solidFill>
+              <a:schemeClr val="bg1"/>
+            </a:solidFill>
+            <a:ln>
+              <a:solidFill>
+                <a:schemeClr val="tx1"/>
+              </a:solidFill>
+            </a:ln>
+          </p:spPr>
+          <p:style>
+            <a:lnRef idx="2">
+              <a:schemeClr val="accent1">
+                <a:shade val="50000"/>
+              </a:schemeClr>
+            </a:lnRef>
+            <a:fillRef idx="1">
+              <a:schemeClr val="accent1"/>
+            </a:fillRef>
+            <a:effectRef idx="0">
+              <a:schemeClr val="accent1"/>
+            </a:effectRef>
+            <a:fontRef idx="minor">
+              <a:schemeClr val="lt1"/>
+            </a:fontRef>
+          </p:style>
+          <p:txBody>
+            <a:bodyPr rtlCol="0" anchor="ctr"/>
+            <a:lstStyle/>
+            <a:p>
+              <a:pPr algn="ctr"/>
+              <a:endParaRPr lang="zh-CN" altLang="en-US"/>
+            </a:p>
+          </p:txBody>
+        </p:sp>
+        <p:sp>
+          <p:nvSpPr>
+            <p:cNvPr id="50" name="文本框 49">
+              <a:extLst>
+                <a:ext uri="{FF2B5EF4-FFF2-40B4-BE49-F238E27FC236}">
+                  <a16:creationId xmlns:a16="http://schemas.microsoft.com/office/drawing/2014/main" id="{1BB79671-E783-4108-8011-890A1C3C7132}"/>
+                </a:ext>
+              </a:extLst>
+            </p:cNvPr>
+            <p:cNvSpPr txBox="1"/>
+            <p:nvPr/>
+          </p:nvSpPr>
+          <p:spPr>
+            <a:xfrm>
+              <a:off x="1826029" y="5182334"/>
+              <a:ext cx="569387" cy="276999"/>
+            </a:xfrm>
+            <a:prstGeom prst="rect">
+              <a:avLst/>
+            </a:prstGeom>
+            <a:noFill/>
+          </p:spPr>
+          <p:txBody>
+            <a:bodyPr wrap="none" rtlCol="0">
+              <a:spAutoFit/>
+            </a:bodyPr>
+            <a:lstStyle/>
+            <a:p>
+              <a:r>
+                <a:rPr lang="en-US" altLang="zh-CN" sz="1200" dirty="0">
+                  <a:latin typeface="宋体" panose="02010600030101010101" pitchFamily="2" charset="-122"/>
+                  <a:ea typeface="宋体" panose="02010600030101010101" pitchFamily="2" charset="-122"/>
+                </a:rPr>
+                <a:t>MySQL</a:t>
+              </a:r>
+              <a:endParaRPr lang="zh-CN" altLang="en-US" sz="1200" dirty="0">
+                <a:latin typeface="宋体" panose="02010600030101010101" pitchFamily="2" charset="-122"/>
+                <a:ea typeface="宋体" panose="02010600030101010101" pitchFamily="2" charset="-122"/>
+              </a:endParaRPr>
+            </a:p>
+          </p:txBody>
+        </p:sp>
+        <p:sp>
+          <p:nvSpPr>
+            <p:cNvPr id="27" name="矩形 26">
+              <a:extLst>
+                <a:ext uri="{FF2B5EF4-FFF2-40B4-BE49-F238E27FC236}">
+                  <a16:creationId xmlns:a16="http://schemas.microsoft.com/office/drawing/2014/main" id="{369BFABE-9C50-4585-96C8-B36E6D3A8030}"/>
+                </a:ext>
+              </a:extLst>
+            </p:cNvPr>
+            <p:cNvSpPr/>
+            <p:nvPr/>
+          </p:nvSpPr>
+          <p:spPr>
+            <a:xfrm>
+              <a:off x="3582015" y="5195191"/>
+              <a:ext cx="707009" cy="285750"/>
+            </a:xfrm>
+            <a:prstGeom prst="rect">
+              <a:avLst/>
+            </a:prstGeom>
+            <a:noFill/>
+            <a:ln>
+              <a:noFill/>
+            </a:ln>
+          </p:spPr>
+          <p:style>
+            <a:lnRef idx="2">
+              <a:schemeClr val="accent1">
+                <a:shade val="50000"/>
+              </a:schemeClr>
+            </a:lnRef>
+            <a:fillRef idx="1">
+              <a:schemeClr val="accent1"/>
+            </a:fillRef>
+            <a:effectRef idx="0">
+              <a:schemeClr val="accent1"/>
+            </a:effectRef>
+            <a:fontRef idx="minor">
+              <a:schemeClr val="lt1"/>
+            </a:fontRef>
+          </p:style>
+          <p:txBody>
+            <a:bodyPr rtlCol="0" anchor="ctr"/>
+            <a:lstStyle/>
+            <a:p>
+              <a:pPr algn="ctr"/>
+              <a:r>
+                <a:rPr lang="en-US" altLang="zh-CN" sz="1200" dirty="0">
+                  <a:solidFill>
+                    <a:schemeClr val="tx1"/>
+                  </a:solidFill>
+                  <a:latin typeface="宋体" panose="02010600030101010101" pitchFamily="2" charset="-122"/>
+                  <a:ea typeface="宋体" panose="02010600030101010101" pitchFamily="2" charset="-122"/>
+                </a:rPr>
+                <a:t>Redis</a:t>
+              </a:r>
+              <a:endParaRPr lang="zh-CN" altLang="en-US" sz="1200" dirty="0">
+                <a:solidFill>
+                  <a:schemeClr val="tx1"/>
+                </a:solidFill>
+                <a:latin typeface="宋体" panose="02010600030101010101" pitchFamily="2" charset="-122"/>
+                <a:ea typeface="宋体" panose="02010600030101010101" pitchFamily="2" charset="-122"/>
+              </a:endParaRPr>
+            </a:p>
+          </p:txBody>
+        </p:sp>
+        <p:cxnSp>
+          <p:nvCxnSpPr>
+            <p:cNvPr id="51" name="直接箭头连接符 50">
+              <a:extLst>
+                <a:ext uri="{FF2B5EF4-FFF2-40B4-BE49-F238E27FC236}">
+                  <a16:creationId xmlns:a16="http://schemas.microsoft.com/office/drawing/2014/main" id="{98C7CD57-8BCF-43EC-B11F-7C4A67BD9CDA}"/>
+                </a:ext>
+              </a:extLst>
+            </p:cNvPr>
+            <p:cNvCxnSpPr>
+              <a:cxnSpLocks/>
+            </p:cNvCxnSpPr>
+            <p:nvPr/>
+          </p:nvCxnSpPr>
+          <p:spPr>
+            <a:xfrm>
+              <a:off x="1237247" y="1630363"/>
+              <a:ext cx="0" cy="281800"/>
+            </a:xfrm>
+            <a:prstGeom prst="straightConnector1">
+              <a:avLst/>
+            </a:prstGeom>
+            <a:ln w="12700">
+              <a:tailEnd type="none"/>
+            </a:ln>
+          </p:spPr>
+          <p:style>
+            <a:lnRef idx="1">
+              <a:schemeClr val="dk1"/>
+            </a:lnRef>
+            <a:fillRef idx="0">
+              <a:schemeClr val="dk1"/>
+            </a:fillRef>
+            <a:effectRef idx="0">
+              <a:schemeClr val="dk1"/>
+            </a:effectRef>
+            <a:fontRef idx="minor">
+              <a:schemeClr val="tx1"/>
+            </a:fontRef>
+          </p:style>
+        </p:cxnSp>
+        <p:cxnSp>
+          <p:nvCxnSpPr>
+            <p:cNvPr id="53" name="直接箭头连接符 52">
+              <a:extLst>
+                <a:ext uri="{FF2B5EF4-FFF2-40B4-BE49-F238E27FC236}">
+                  <a16:creationId xmlns:a16="http://schemas.microsoft.com/office/drawing/2014/main" id="{31C99EC1-ED7B-4624-948A-ECECF851D938}"/>
+                </a:ext>
+              </a:extLst>
+            </p:cNvPr>
+            <p:cNvCxnSpPr>
+              <a:cxnSpLocks/>
+            </p:cNvCxnSpPr>
+            <p:nvPr/>
+          </p:nvCxnSpPr>
+          <p:spPr>
+            <a:xfrm>
+              <a:off x="4001606" y="1630363"/>
+              <a:ext cx="0" cy="281800"/>
+            </a:xfrm>
+            <a:prstGeom prst="straightConnector1">
+              <a:avLst/>
+            </a:prstGeom>
+            <a:ln w="12700">
+              <a:tailEnd type="none"/>
+            </a:ln>
+          </p:spPr>
+          <p:style>
+            <a:lnRef idx="1">
+              <a:schemeClr val="dk1"/>
+            </a:lnRef>
+            <a:fillRef idx="0">
+              <a:schemeClr val="dk1"/>
+            </a:fillRef>
+            <a:effectRef idx="0">
+              <a:schemeClr val="dk1"/>
+            </a:effectRef>
+            <a:fontRef idx="minor">
+              <a:schemeClr val="tx1"/>
+            </a:fontRef>
+          </p:style>
+        </p:cxnSp>
+        <p:cxnSp>
+          <p:nvCxnSpPr>
+            <p:cNvPr id="55" name="直接箭头连接符 54">
+              <a:extLst>
+                <a:ext uri="{FF2B5EF4-FFF2-40B4-BE49-F238E27FC236}">
+                  <a16:creationId xmlns:a16="http://schemas.microsoft.com/office/drawing/2014/main" id="{43A40097-9C0C-4164-95D3-580328B73D0A}"/>
+                </a:ext>
+              </a:extLst>
+            </p:cNvPr>
+            <p:cNvCxnSpPr>
+              <a:cxnSpLocks/>
+            </p:cNvCxnSpPr>
+            <p:nvPr/>
+          </p:nvCxnSpPr>
+          <p:spPr>
+            <a:xfrm>
+              <a:off x="2465952" y="3024456"/>
+              <a:ext cx="0" cy="133893"/>
+            </a:xfrm>
+            <a:prstGeom prst="straightConnector1">
+              <a:avLst/>
+            </a:prstGeom>
+            <a:ln w="12700">
+              <a:tailEnd type="none"/>
+            </a:ln>
+          </p:spPr>
+          <p:style>
+            <a:lnRef idx="1">
+              <a:schemeClr val="dk1"/>
+            </a:lnRef>
+            <a:fillRef idx="0">
+              <a:schemeClr val="dk1"/>
+            </a:fillRef>
+            <a:effectRef idx="0">
+              <a:schemeClr val="dk1"/>
+            </a:effectRef>
+            <a:fontRef idx="minor">
+              <a:schemeClr val="tx1"/>
+            </a:fontRef>
+          </p:style>
+        </p:cxnSp>
+        <p:cxnSp>
+          <p:nvCxnSpPr>
+            <p:cNvPr id="57" name="直接箭头连接符 56">
+              <a:extLst>
+                <a:ext uri="{FF2B5EF4-FFF2-40B4-BE49-F238E27FC236}">
+                  <a16:creationId xmlns:a16="http://schemas.microsoft.com/office/drawing/2014/main" id="{F5934B95-BA21-40FF-95B0-92B13497D147}"/>
+                </a:ext>
+              </a:extLst>
+            </p:cNvPr>
+            <p:cNvCxnSpPr/>
+            <p:nvPr/>
+          </p:nvCxnSpPr>
+          <p:spPr>
+            <a:xfrm>
+              <a:off x="2465952" y="3733115"/>
+              <a:ext cx="0" cy="210750"/>
+            </a:xfrm>
+            <a:prstGeom prst="straightConnector1">
+              <a:avLst/>
+            </a:prstGeom>
+            <a:ln w="12700">
+              <a:tailEnd type="none"/>
+            </a:ln>
+          </p:spPr>
+          <p:style>
+            <a:lnRef idx="1">
+              <a:schemeClr val="dk1"/>
+            </a:lnRef>
+            <a:fillRef idx="0">
+              <a:schemeClr val="dk1"/>
+            </a:fillRef>
+            <a:effectRef idx="0">
+              <a:schemeClr val="dk1"/>
+            </a:effectRef>
+            <a:fontRef idx="minor">
+              <a:schemeClr val="tx1"/>
+            </a:fontRef>
+          </p:style>
+        </p:cxnSp>
+        <p:cxnSp>
+          <p:nvCxnSpPr>
+            <p:cNvPr id="58" name="直接箭头连接符 57">
+              <a:extLst>
+                <a:ext uri="{FF2B5EF4-FFF2-40B4-BE49-F238E27FC236}">
+                  <a16:creationId xmlns:a16="http://schemas.microsoft.com/office/drawing/2014/main" id="{E0C61688-91E3-430B-9145-04005AADA771}"/>
+                </a:ext>
+              </a:extLst>
+            </p:cNvPr>
+            <p:cNvCxnSpPr>
+              <a:cxnSpLocks/>
+            </p:cNvCxnSpPr>
+            <p:nvPr/>
+          </p:nvCxnSpPr>
+          <p:spPr>
+            <a:xfrm>
+              <a:off x="2465952" y="4528756"/>
+              <a:ext cx="0" cy="280777"/>
+            </a:xfrm>
+            <a:prstGeom prst="straightConnector1">
+              <a:avLst/>
+            </a:prstGeom>
+            <a:ln w="12700">
+              <a:tailEnd type="none"/>
+            </a:ln>
+          </p:spPr>
+          <p:style>
+            <a:lnRef idx="1">
+              <a:schemeClr val="dk1"/>
+            </a:lnRef>
+            <a:fillRef idx="0">
+              <a:schemeClr val="dk1"/>
+            </a:fillRef>
+            <a:effectRef idx="0">
+              <a:schemeClr val="dk1"/>
+            </a:effectRef>
+            <a:fontRef idx="minor">
+              <a:schemeClr val="tx1"/>
+            </a:fontRef>
+          </p:style>
+        </p:cxnSp>
+        <p:sp>
+          <p:nvSpPr>
+            <p:cNvPr id="60" name="矩形 59">
+              <a:extLst>
+                <a:ext uri="{FF2B5EF4-FFF2-40B4-BE49-F238E27FC236}">
+                  <a16:creationId xmlns:a16="http://schemas.microsoft.com/office/drawing/2014/main" id="{FDB9A8F2-E8FF-42A5-8AF9-94E36107C132}"/>
+                </a:ext>
+              </a:extLst>
+            </p:cNvPr>
+            <p:cNvSpPr/>
+            <p:nvPr/>
+          </p:nvSpPr>
+          <p:spPr>
+            <a:xfrm>
+              <a:off x="5422165" y="1912163"/>
+              <a:ext cx="373715" cy="2616593"/>
+            </a:xfrm>
+            <a:prstGeom prst="rect">
+              <a:avLst/>
+            </a:prstGeom>
+            <a:solidFill>
+              <a:srgbClr val="F1E2A0"/>
+            </a:solidFill>
+            <a:ln>
+              <a:noFill/>
+            </a:ln>
+          </p:spPr>
+          <p:style>
+            <a:lnRef idx="2">
+              <a:schemeClr val="accent1">
+                <a:shade val="50000"/>
+              </a:schemeClr>
+            </a:lnRef>
+            <a:fillRef idx="1">
+              <a:schemeClr val="accent1"/>
+            </a:fillRef>
+            <a:effectRef idx="0">
+              <a:schemeClr val="accent1"/>
+            </a:effectRef>
+            <a:fontRef idx="minor">
+              <a:schemeClr val="lt1"/>
+            </a:fontRef>
+          </p:style>
+          <p:txBody>
+            <a:bodyPr rtlCol="0" anchor="ctr"/>
+            <a:lstStyle/>
+            <a:p>
+              <a:pPr algn="ctr"/>
+              <a:endParaRPr lang="zh-CN" altLang="en-US"/>
+            </a:p>
+          </p:txBody>
+        </p:sp>
+        <p:sp>
+          <p:nvSpPr>
+            <p:cNvPr id="61" name="文本框 60">
+              <a:extLst>
+                <a:ext uri="{FF2B5EF4-FFF2-40B4-BE49-F238E27FC236}">
+                  <a16:creationId xmlns:a16="http://schemas.microsoft.com/office/drawing/2014/main" id="{60724988-2D6F-4B9E-BFFF-96677C999885}"/>
+                </a:ext>
+              </a:extLst>
+            </p:cNvPr>
+            <p:cNvSpPr txBox="1"/>
+            <p:nvPr/>
+          </p:nvSpPr>
+          <p:spPr>
+            <a:xfrm>
+              <a:off x="5419694" y="2930971"/>
+              <a:ext cx="369332" cy="707886"/>
+            </a:xfrm>
+            <a:prstGeom prst="rect">
+              <a:avLst/>
+            </a:prstGeom>
+            <a:noFill/>
+          </p:spPr>
+          <p:txBody>
+            <a:bodyPr vert="eaVert" wrap="none" rtlCol="0">
+              <a:spAutoFit/>
+            </a:bodyPr>
+            <a:lstStyle/>
+            <a:p>
+              <a:r>
+                <a:rPr lang="zh-CN" altLang="en-US" sz="1200" dirty="0">
+                  <a:latin typeface="宋体" panose="02010600030101010101" pitchFamily="2" charset="-122"/>
+                  <a:ea typeface="宋体" panose="02010600030101010101" pitchFamily="2" charset="-122"/>
+                </a:rPr>
+                <a:t>日志记录</a:t>
+              </a:r>
+            </a:p>
+          </p:txBody>
+        </p:sp>
+        <p:sp>
+          <p:nvSpPr>
+            <p:cNvPr id="62" name="矩形 61">
+              <a:extLst>
+                <a:ext uri="{FF2B5EF4-FFF2-40B4-BE49-F238E27FC236}">
+                  <a16:creationId xmlns:a16="http://schemas.microsoft.com/office/drawing/2014/main" id="{5239B2A3-D113-445C-867A-23411A2048B6}"/>
+                </a:ext>
+              </a:extLst>
+            </p:cNvPr>
+            <p:cNvSpPr/>
+            <p:nvPr/>
+          </p:nvSpPr>
+          <p:spPr>
+            <a:xfrm>
+              <a:off x="5919678" y="1729105"/>
+              <a:ext cx="373715" cy="2799651"/>
+            </a:xfrm>
+            <a:prstGeom prst="rect">
+              <a:avLst/>
+            </a:prstGeom>
+            <a:solidFill>
+              <a:srgbClr val="F097CA"/>
+            </a:solidFill>
+            <a:ln>
+              <a:noFill/>
+            </a:ln>
+          </p:spPr>
+          <p:style>
+            <a:lnRef idx="2">
+              <a:schemeClr val="accent1">
+                <a:shade val="50000"/>
+              </a:schemeClr>
+            </a:lnRef>
+            <a:fillRef idx="1">
+              <a:schemeClr val="accent1"/>
+            </a:fillRef>
+            <a:effectRef idx="0">
+              <a:schemeClr val="accent1"/>
+            </a:effectRef>
+            <a:fontRef idx="minor">
+              <a:schemeClr val="lt1"/>
+            </a:fontRef>
+          </p:style>
+          <p:txBody>
+            <a:bodyPr rtlCol="0" anchor="ctr"/>
+            <a:lstStyle/>
+            <a:p>
+              <a:pPr algn="ctr"/>
+              <a:endParaRPr lang="zh-CN" altLang="en-US"/>
+            </a:p>
+          </p:txBody>
+        </p:sp>
+        <p:sp>
+          <p:nvSpPr>
+            <p:cNvPr id="63" name="文本框 62">
+              <a:extLst>
+                <a:ext uri="{FF2B5EF4-FFF2-40B4-BE49-F238E27FC236}">
+                  <a16:creationId xmlns:a16="http://schemas.microsoft.com/office/drawing/2014/main" id="{4176C7EB-C935-4BEF-A25E-E07BF6FE0F8E}"/>
+                </a:ext>
+              </a:extLst>
+            </p:cNvPr>
+            <p:cNvSpPr txBox="1"/>
+            <p:nvPr/>
+          </p:nvSpPr>
+          <p:spPr>
+            <a:xfrm>
+              <a:off x="5919515" y="2408297"/>
+              <a:ext cx="369332" cy="707886"/>
+            </a:xfrm>
+            <a:prstGeom prst="rect">
+              <a:avLst/>
+            </a:prstGeom>
+            <a:noFill/>
+          </p:spPr>
+          <p:txBody>
+            <a:bodyPr vert="eaVert" wrap="none" rtlCol="0">
+              <a:spAutoFit/>
+            </a:bodyPr>
+            <a:lstStyle/>
+            <a:p>
+              <a:r>
+                <a:rPr lang="zh-CN" altLang="en-US" sz="1200" dirty="0">
+                  <a:latin typeface="宋体" panose="02010600030101010101" pitchFamily="2" charset="-122"/>
+                  <a:ea typeface="宋体" panose="02010600030101010101" pitchFamily="2" charset="-122"/>
+                </a:rPr>
+                <a:t>权限控制</a:t>
+              </a:r>
+            </a:p>
+          </p:txBody>
+        </p:sp>
+        <p:sp>
+          <p:nvSpPr>
+            <p:cNvPr id="52" name="矩形 51">
+              <a:extLst>
+                <a:ext uri="{FF2B5EF4-FFF2-40B4-BE49-F238E27FC236}">
+                  <a16:creationId xmlns:a16="http://schemas.microsoft.com/office/drawing/2014/main" id="{A97EF94D-BBB3-4546-BC7B-A0C297455969}"/>
+                </a:ext>
+              </a:extLst>
+            </p:cNvPr>
+            <p:cNvSpPr/>
+            <p:nvPr/>
+          </p:nvSpPr>
+          <p:spPr>
+            <a:xfrm>
+              <a:off x="2791978" y="1201571"/>
+              <a:ext cx="800219" cy="285750"/>
+            </a:xfrm>
+            <a:prstGeom prst="rect">
+              <a:avLst/>
+            </a:prstGeom>
+            <a:noFill/>
+            <a:ln>
+              <a:solidFill>
+                <a:schemeClr val="tx1"/>
+              </a:solidFill>
+            </a:ln>
+          </p:spPr>
+          <p:style>
+            <a:lnRef idx="2">
+              <a:schemeClr val="accent1">
+                <a:shade val="50000"/>
+              </a:schemeClr>
+            </a:lnRef>
+            <a:fillRef idx="1">
+              <a:schemeClr val="accent1"/>
+            </a:fillRef>
+            <a:effectRef idx="0">
+              <a:schemeClr val="accent1"/>
+            </a:effectRef>
+            <a:fontRef idx="minor">
+              <a:schemeClr val="lt1"/>
+            </a:fontRef>
+          </p:style>
+          <p:txBody>
+            <a:bodyPr rtlCol="0" anchor="ctr"/>
+            <a:lstStyle/>
+            <a:p>
+              <a:r>
+                <a:rPr lang="en-US" altLang="zh-CN" sz="1200" dirty="0">
+                  <a:solidFill>
+                    <a:schemeClr val="tx1"/>
+                  </a:solidFill>
+                  <a:latin typeface="宋体" panose="02010600030101010101" pitchFamily="2" charset="-122"/>
+                  <a:ea typeface="宋体" panose="02010600030101010101" pitchFamily="2" charset="-122"/>
+                </a:rPr>
+                <a:t>Ajax</a:t>
+              </a:r>
+              <a:r>
+                <a:rPr lang="zh-CN" altLang="en-US" sz="1200" dirty="0">
+                  <a:solidFill>
+                    <a:schemeClr val="tx1"/>
+                  </a:solidFill>
+                  <a:latin typeface="宋体" panose="02010600030101010101" pitchFamily="2" charset="-122"/>
+                  <a:ea typeface="宋体" panose="02010600030101010101" pitchFamily="2" charset="-122"/>
+                </a:rPr>
+                <a:t>交互</a:t>
               </a:r>
             </a:p>
           </p:txBody>
         </p:sp>
       </p:grpSp>
-      <p:sp>
-        <p:nvSpPr>
-          <p:cNvPr id="41" name="矩形 40">
-            <a:extLst>
-              <a:ext uri="{FF2B5EF4-FFF2-40B4-BE49-F238E27FC236}">
-                <a16:creationId xmlns:a16="http://schemas.microsoft.com/office/drawing/2014/main" id="{4127CC8B-3703-468B-86C7-2BF591F45D3E}"/>
-              </a:ext>
-            </a:extLst>
-          </p:cNvPr>
-          <p:cNvSpPr/>
-          <p:nvPr/>
-        </p:nvSpPr>
-        <p:spPr>
-          <a:xfrm>
-            <a:off x="193088" y="3412349"/>
-            <a:ext cx="5138918" cy="589350"/>
-          </a:xfrm>
-          <a:prstGeom prst="rect">
-            <a:avLst/>
-          </a:prstGeom>
-          <a:solidFill>
-            <a:srgbClr val="FFCCCC"/>
-          </a:solidFill>
-          <a:ln>
-            <a:noFill/>
-          </a:ln>
-        </p:spPr>
-        <p:style>
-          <a:lnRef idx="2">
-            <a:schemeClr val="accent1">
-              <a:shade val="50000"/>
-            </a:schemeClr>
-          </a:lnRef>
-          <a:fillRef idx="1">
-            <a:schemeClr val="accent1"/>
-          </a:fillRef>
-          <a:effectRef idx="0">
-            <a:schemeClr val="accent1"/>
-          </a:effectRef>
-          <a:fontRef idx="minor">
-            <a:schemeClr val="lt1"/>
-          </a:fontRef>
-        </p:style>
-        <p:txBody>
-          <a:bodyPr rtlCol="0" anchor="ctr"/>
-          <a:lstStyle/>
-          <a:p>
-            <a:pPr algn="ctr"/>
-            <a:endParaRPr lang="zh-CN" altLang="en-US"/>
-          </a:p>
-        </p:txBody>
-      </p:sp>
-      <p:sp>
-        <p:nvSpPr>
-          <p:cNvPr id="42" name="文本框 41">
-            <a:extLst>
-              <a:ext uri="{FF2B5EF4-FFF2-40B4-BE49-F238E27FC236}">
-                <a16:creationId xmlns:a16="http://schemas.microsoft.com/office/drawing/2014/main" id="{C0709153-77A3-4DB6-857C-38E301A9E58C}"/>
-              </a:ext>
-            </a:extLst>
-          </p:cNvPr>
-          <p:cNvSpPr txBox="1"/>
-          <p:nvPr/>
-        </p:nvSpPr>
-        <p:spPr>
-          <a:xfrm>
-            <a:off x="190616" y="3540084"/>
-            <a:ext cx="954107" cy="276999"/>
-          </a:xfrm>
-          <a:prstGeom prst="rect">
-            <a:avLst/>
-          </a:prstGeom>
-          <a:noFill/>
-        </p:spPr>
-        <p:txBody>
-          <a:bodyPr wrap="none" rtlCol="0">
-            <a:spAutoFit/>
-          </a:bodyPr>
-          <a:lstStyle/>
-          <a:p>
-            <a:r>
-              <a:rPr lang="zh-CN" altLang="en-US" sz="1200" dirty="0">
-                <a:latin typeface="宋体" panose="02010600030101010101" pitchFamily="2" charset="-122"/>
-                <a:ea typeface="宋体" panose="02010600030101010101" pitchFamily="2" charset="-122"/>
-              </a:rPr>
-              <a:t>分析检测层</a:t>
-            </a:r>
-          </a:p>
-        </p:txBody>
-      </p:sp>
-      <p:sp>
-        <p:nvSpPr>
-          <p:cNvPr id="43" name="矩形 42">
-            <a:extLst>
-              <a:ext uri="{FF2B5EF4-FFF2-40B4-BE49-F238E27FC236}">
-                <a16:creationId xmlns:a16="http://schemas.microsoft.com/office/drawing/2014/main" id="{23B3B5B7-84A8-44C9-84A6-92917F96F06A}"/>
-              </a:ext>
-            </a:extLst>
-          </p:cNvPr>
-          <p:cNvSpPr/>
-          <p:nvPr/>
-        </p:nvSpPr>
-        <p:spPr>
-          <a:xfrm>
-            <a:off x="1144723" y="3535708"/>
-            <a:ext cx="964035" cy="285750"/>
-          </a:xfrm>
-          <a:prstGeom prst="rect">
-            <a:avLst/>
-          </a:prstGeom>
-          <a:noFill/>
-          <a:ln>
-            <a:solidFill>
-              <a:schemeClr val="tx1"/>
-            </a:solidFill>
-          </a:ln>
-        </p:spPr>
-        <p:style>
-          <a:lnRef idx="2">
-            <a:schemeClr val="accent1">
-              <a:shade val="50000"/>
-            </a:schemeClr>
-          </a:lnRef>
-          <a:fillRef idx="1">
-            <a:schemeClr val="accent1"/>
-          </a:fillRef>
-          <a:effectRef idx="0">
-            <a:schemeClr val="accent1"/>
-          </a:effectRef>
-          <a:fontRef idx="minor">
-            <a:schemeClr val="lt1"/>
-          </a:fontRef>
-        </p:style>
-        <p:txBody>
-          <a:bodyPr rtlCol="0" anchor="ctr"/>
-          <a:lstStyle/>
-          <a:p>
-            <a:pPr algn="ctr"/>
-            <a:r>
-              <a:rPr lang="zh-CN" altLang="en-US" sz="1200" dirty="0">
-                <a:solidFill>
-                  <a:schemeClr val="tx1"/>
-                </a:solidFill>
-                <a:latin typeface="宋体" panose="02010600030101010101" pitchFamily="2" charset="-122"/>
-                <a:ea typeface="宋体" panose="02010600030101010101" pitchFamily="2" charset="-122"/>
-              </a:rPr>
-              <a:t>数据预处理</a:t>
-            </a:r>
-          </a:p>
-        </p:txBody>
-      </p:sp>
-      <p:sp>
-        <p:nvSpPr>
-          <p:cNvPr id="44" name="矩形 43">
-            <a:extLst>
-              <a:ext uri="{FF2B5EF4-FFF2-40B4-BE49-F238E27FC236}">
-                <a16:creationId xmlns:a16="http://schemas.microsoft.com/office/drawing/2014/main" id="{BE8BF990-D497-4595-A0DF-DBE69B1DDC13}"/>
-              </a:ext>
-            </a:extLst>
-          </p:cNvPr>
-          <p:cNvSpPr/>
-          <p:nvPr/>
-        </p:nvSpPr>
-        <p:spPr>
-          <a:xfrm>
-            <a:off x="2339818" y="3535708"/>
-            <a:ext cx="1073278" cy="285750"/>
-          </a:xfrm>
-          <a:prstGeom prst="rect">
-            <a:avLst/>
-          </a:prstGeom>
-          <a:noFill/>
-          <a:ln>
-            <a:solidFill>
-              <a:schemeClr val="tx1"/>
-            </a:solidFill>
-          </a:ln>
-        </p:spPr>
-        <p:style>
-          <a:lnRef idx="2">
-            <a:schemeClr val="accent1">
-              <a:shade val="50000"/>
-            </a:schemeClr>
-          </a:lnRef>
-          <a:fillRef idx="1">
-            <a:schemeClr val="accent1"/>
-          </a:fillRef>
-          <a:effectRef idx="0">
-            <a:schemeClr val="accent1"/>
-          </a:effectRef>
-          <a:fontRef idx="minor">
-            <a:schemeClr val="lt1"/>
-          </a:fontRef>
-        </p:style>
-        <p:txBody>
-          <a:bodyPr rtlCol="0" anchor="ctr"/>
-          <a:lstStyle/>
-          <a:p>
-            <a:pPr algn="ctr"/>
-            <a:r>
-              <a:rPr lang="en-US" altLang="zh-CN" sz="1200" dirty="0">
-                <a:solidFill>
-                  <a:schemeClr val="tx1"/>
-                </a:solidFill>
-                <a:latin typeface="宋体" panose="02010600030101010101" pitchFamily="2" charset="-122"/>
-                <a:ea typeface="宋体" panose="02010600030101010101" pitchFamily="2" charset="-122"/>
-              </a:rPr>
-              <a:t>IED-WPAT</a:t>
-            </a:r>
-            <a:endParaRPr lang="zh-CN" altLang="en-US" sz="1200" dirty="0">
-              <a:solidFill>
-                <a:schemeClr val="tx1"/>
-              </a:solidFill>
-              <a:latin typeface="宋体" panose="02010600030101010101" pitchFamily="2" charset="-122"/>
-              <a:ea typeface="宋体" panose="02010600030101010101" pitchFamily="2" charset="-122"/>
-            </a:endParaRPr>
-          </a:p>
-        </p:txBody>
-      </p:sp>
-      <p:sp>
-        <p:nvSpPr>
-          <p:cNvPr id="45" name="矩形 44">
-            <a:extLst>
-              <a:ext uri="{FF2B5EF4-FFF2-40B4-BE49-F238E27FC236}">
-                <a16:creationId xmlns:a16="http://schemas.microsoft.com/office/drawing/2014/main" id="{230092A4-761B-4590-9076-6E8D006AF21F}"/>
-              </a:ext>
-            </a:extLst>
-          </p:cNvPr>
-          <p:cNvSpPr/>
-          <p:nvPr/>
-        </p:nvSpPr>
-        <p:spPr>
-          <a:xfrm>
-            <a:off x="3569720" y="3539775"/>
-            <a:ext cx="1492779" cy="285750"/>
-          </a:xfrm>
-          <a:prstGeom prst="rect">
-            <a:avLst/>
-          </a:prstGeom>
-          <a:noFill/>
-          <a:ln>
-            <a:solidFill>
-              <a:schemeClr val="tx1"/>
-            </a:solidFill>
-          </a:ln>
-        </p:spPr>
-        <p:style>
-          <a:lnRef idx="2">
-            <a:schemeClr val="accent1">
-              <a:shade val="50000"/>
-            </a:schemeClr>
-          </a:lnRef>
-          <a:fillRef idx="1">
-            <a:schemeClr val="accent1"/>
-          </a:fillRef>
-          <a:effectRef idx="0">
-            <a:schemeClr val="accent1"/>
-          </a:effectRef>
-          <a:fontRef idx="minor">
-            <a:schemeClr val="lt1"/>
-          </a:fontRef>
-        </p:style>
-        <p:txBody>
-          <a:bodyPr rtlCol="0" anchor="ctr"/>
-          <a:lstStyle/>
-          <a:p>
-            <a:pPr algn="ctr"/>
-            <a:r>
-              <a:rPr lang="en-US" altLang="zh-CN" sz="1200" dirty="0">
-                <a:solidFill>
-                  <a:schemeClr val="tx1"/>
-                </a:solidFill>
-                <a:latin typeface="宋体" panose="02010600030101010101" pitchFamily="2" charset="-122"/>
-                <a:ea typeface="宋体" panose="02010600030101010101" pitchFamily="2" charset="-122"/>
-              </a:rPr>
-              <a:t>MaskTST</a:t>
-            </a:r>
-            <a:r>
-              <a:rPr lang="zh-CN" altLang="en-US" sz="1200" dirty="0">
-                <a:solidFill>
-                  <a:schemeClr val="tx1"/>
-                </a:solidFill>
-                <a:latin typeface="宋体" panose="02010600030101010101" pitchFamily="2" charset="-122"/>
-                <a:ea typeface="宋体" panose="02010600030101010101" pitchFamily="2" charset="-122"/>
-              </a:rPr>
-              <a:t>多中心聚类</a:t>
-            </a:r>
-          </a:p>
-        </p:txBody>
-      </p:sp>
-      <p:sp>
-        <p:nvSpPr>
-          <p:cNvPr id="46" name="矩形 45">
-            <a:extLst>
-              <a:ext uri="{FF2B5EF4-FFF2-40B4-BE49-F238E27FC236}">
-                <a16:creationId xmlns:a16="http://schemas.microsoft.com/office/drawing/2014/main" id="{B2C69848-562B-40F9-82E6-83341736773A}"/>
-              </a:ext>
-            </a:extLst>
-          </p:cNvPr>
-          <p:cNvSpPr/>
-          <p:nvPr/>
-        </p:nvSpPr>
-        <p:spPr>
-          <a:xfrm>
-            <a:off x="195558" y="5063533"/>
-            <a:ext cx="6108700" cy="881495"/>
-          </a:xfrm>
-          <a:prstGeom prst="rect">
-            <a:avLst/>
-          </a:prstGeom>
-          <a:solidFill>
-            <a:srgbClr val="FADDEC"/>
-          </a:solidFill>
-          <a:ln>
-            <a:noFill/>
-          </a:ln>
-        </p:spPr>
-        <p:style>
-          <a:lnRef idx="2">
-            <a:schemeClr val="accent1">
-              <a:shade val="50000"/>
-            </a:schemeClr>
-          </a:lnRef>
-          <a:fillRef idx="1">
-            <a:schemeClr val="accent1"/>
-          </a:fillRef>
-          <a:effectRef idx="0">
-            <a:schemeClr val="accent1"/>
-          </a:effectRef>
-          <a:fontRef idx="minor">
-            <a:schemeClr val="lt1"/>
-          </a:fontRef>
-        </p:style>
-        <p:txBody>
-          <a:bodyPr rtlCol="0" anchor="ctr"/>
-          <a:lstStyle/>
-          <a:p>
-            <a:pPr algn="ctr"/>
-            <a:endParaRPr lang="zh-CN" altLang="en-US"/>
-          </a:p>
-        </p:txBody>
-      </p:sp>
-      <p:sp>
-        <p:nvSpPr>
-          <p:cNvPr id="47" name="文本框 46">
-            <a:extLst>
-              <a:ext uri="{FF2B5EF4-FFF2-40B4-BE49-F238E27FC236}">
-                <a16:creationId xmlns:a16="http://schemas.microsoft.com/office/drawing/2014/main" id="{CB98F292-5626-43A7-8DBC-D0FD28D4CB87}"/>
-              </a:ext>
-            </a:extLst>
-          </p:cNvPr>
-          <p:cNvSpPr txBox="1"/>
-          <p:nvPr/>
-        </p:nvSpPr>
-        <p:spPr>
-          <a:xfrm>
-            <a:off x="190615" y="5321634"/>
-            <a:ext cx="646331" cy="276999"/>
-          </a:xfrm>
-          <a:prstGeom prst="rect">
-            <a:avLst/>
-          </a:prstGeom>
-          <a:noFill/>
-        </p:spPr>
-        <p:txBody>
-          <a:bodyPr wrap="none" rtlCol="0">
-            <a:spAutoFit/>
-          </a:bodyPr>
-          <a:lstStyle/>
-          <a:p>
-            <a:r>
-              <a:rPr lang="zh-CN" altLang="en-US" sz="1200" dirty="0">
-                <a:latin typeface="宋体" panose="02010600030101010101" pitchFamily="2" charset="-122"/>
-                <a:ea typeface="宋体" panose="02010600030101010101" pitchFamily="2" charset="-122"/>
-              </a:rPr>
-              <a:t>数据库</a:t>
-            </a:r>
-          </a:p>
-        </p:txBody>
-      </p:sp>
-      <p:sp>
-        <p:nvSpPr>
-          <p:cNvPr id="48" name="流程图: 磁盘 47">
-            <a:extLst>
-              <a:ext uri="{FF2B5EF4-FFF2-40B4-BE49-F238E27FC236}">
-                <a16:creationId xmlns:a16="http://schemas.microsoft.com/office/drawing/2014/main" id="{A22EAEFD-84A7-4949-AEC8-29D37A127CC2}"/>
-              </a:ext>
-            </a:extLst>
-          </p:cNvPr>
-          <p:cNvSpPr/>
-          <p:nvPr/>
-        </p:nvSpPr>
-        <p:spPr>
-          <a:xfrm>
-            <a:off x="1705344" y="5179894"/>
-            <a:ext cx="914400" cy="612648"/>
-          </a:xfrm>
-          <a:prstGeom prst="flowChartMagneticDisk">
-            <a:avLst/>
-          </a:prstGeom>
-          <a:solidFill>
-            <a:schemeClr val="bg1"/>
-          </a:solidFill>
-          <a:ln>
-            <a:solidFill>
-              <a:schemeClr val="tx1"/>
-            </a:solidFill>
-          </a:ln>
-        </p:spPr>
-        <p:style>
-          <a:lnRef idx="2">
-            <a:schemeClr val="accent1">
-              <a:shade val="50000"/>
-            </a:schemeClr>
-          </a:lnRef>
-          <a:fillRef idx="1">
-            <a:schemeClr val="accent1"/>
-          </a:fillRef>
-          <a:effectRef idx="0">
-            <a:schemeClr val="accent1"/>
-          </a:effectRef>
-          <a:fontRef idx="minor">
-            <a:schemeClr val="lt1"/>
-          </a:fontRef>
-        </p:style>
-        <p:txBody>
-          <a:bodyPr rtlCol="0" anchor="ctr"/>
-          <a:lstStyle/>
-          <a:p>
-            <a:pPr algn="ctr"/>
-            <a:endParaRPr lang="zh-CN" altLang="en-US"/>
-          </a:p>
-        </p:txBody>
-      </p:sp>
-      <p:sp>
-        <p:nvSpPr>
-          <p:cNvPr id="49" name="流程图: 磁盘 48">
-            <a:extLst>
-              <a:ext uri="{FF2B5EF4-FFF2-40B4-BE49-F238E27FC236}">
-                <a16:creationId xmlns:a16="http://schemas.microsoft.com/office/drawing/2014/main" id="{722D832C-E61B-4ACB-B5C3-94BE8F6473A4}"/>
-              </a:ext>
-            </a:extLst>
-          </p:cNvPr>
-          <p:cNvSpPr/>
-          <p:nvPr/>
-        </p:nvSpPr>
-        <p:spPr>
-          <a:xfrm>
-            <a:off x="3488143" y="5197956"/>
-            <a:ext cx="914400" cy="612648"/>
-          </a:xfrm>
-          <a:prstGeom prst="flowChartMagneticDisk">
-            <a:avLst/>
-          </a:prstGeom>
-          <a:solidFill>
-            <a:schemeClr val="bg1"/>
-          </a:solidFill>
-          <a:ln>
-            <a:solidFill>
-              <a:schemeClr val="tx1"/>
-            </a:solidFill>
-          </a:ln>
-        </p:spPr>
-        <p:style>
-          <a:lnRef idx="2">
-            <a:schemeClr val="accent1">
-              <a:shade val="50000"/>
-            </a:schemeClr>
-          </a:lnRef>
-          <a:fillRef idx="1">
-            <a:schemeClr val="accent1"/>
-          </a:fillRef>
-          <a:effectRef idx="0">
-            <a:schemeClr val="accent1"/>
-          </a:effectRef>
-          <a:fontRef idx="minor">
-            <a:schemeClr val="lt1"/>
-          </a:fontRef>
-        </p:style>
-        <p:txBody>
-          <a:bodyPr rtlCol="0" anchor="ctr"/>
-          <a:lstStyle/>
-          <a:p>
-            <a:pPr algn="ctr"/>
-            <a:endParaRPr lang="zh-CN" altLang="en-US"/>
-          </a:p>
-        </p:txBody>
-      </p:sp>
-      <p:sp>
-        <p:nvSpPr>
-          <p:cNvPr id="50" name="文本框 49">
-            <a:extLst>
-              <a:ext uri="{FF2B5EF4-FFF2-40B4-BE49-F238E27FC236}">
-                <a16:creationId xmlns:a16="http://schemas.microsoft.com/office/drawing/2014/main" id="{1BB79671-E783-4108-8011-890A1C3C7132}"/>
-              </a:ext>
-            </a:extLst>
-          </p:cNvPr>
-          <p:cNvSpPr txBox="1"/>
-          <p:nvPr/>
-        </p:nvSpPr>
-        <p:spPr>
-          <a:xfrm>
-            <a:off x="1835852" y="5436334"/>
-            <a:ext cx="569387" cy="276999"/>
-          </a:xfrm>
-          <a:prstGeom prst="rect">
-            <a:avLst/>
-          </a:prstGeom>
-          <a:noFill/>
-        </p:spPr>
-        <p:txBody>
-          <a:bodyPr wrap="none" rtlCol="0">
-            <a:spAutoFit/>
-          </a:bodyPr>
-          <a:lstStyle/>
-          <a:p>
-            <a:r>
-              <a:rPr lang="en-US" altLang="zh-CN" sz="1200" dirty="0">
-                <a:latin typeface="宋体" panose="02010600030101010101" pitchFamily="2" charset="-122"/>
-                <a:ea typeface="宋体" panose="02010600030101010101" pitchFamily="2" charset="-122"/>
-              </a:rPr>
-              <a:t>MySQL</a:t>
-            </a:r>
-            <a:endParaRPr lang="zh-CN" altLang="en-US" sz="1200" dirty="0">
-              <a:latin typeface="宋体" panose="02010600030101010101" pitchFamily="2" charset="-122"/>
-              <a:ea typeface="宋体" panose="02010600030101010101" pitchFamily="2" charset="-122"/>
-            </a:endParaRPr>
-          </a:p>
-        </p:txBody>
-      </p:sp>
-      <p:sp>
-        <p:nvSpPr>
-          <p:cNvPr id="27" name="矩形 26">
-            <a:extLst>
-              <a:ext uri="{FF2B5EF4-FFF2-40B4-BE49-F238E27FC236}">
-                <a16:creationId xmlns:a16="http://schemas.microsoft.com/office/drawing/2014/main" id="{369BFABE-9C50-4585-96C8-B36E6D3A8030}"/>
-              </a:ext>
-            </a:extLst>
-          </p:cNvPr>
-          <p:cNvSpPr/>
-          <p:nvPr/>
-        </p:nvSpPr>
-        <p:spPr>
-          <a:xfrm>
-            <a:off x="3591838" y="5449191"/>
-            <a:ext cx="707009" cy="285750"/>
-          </a:xfrm>
-          <a:prstGeom prst="rect">
-            <a:avLst/>
-          </a:prstGeom>
-          <a:noFill/>
-          <a:ln>
-            <a:noFill/>
-          </a:ln>
-        </p:spPr>
-        <p:style>
-          <a:lnRef idx="2">
-            <a:schemeClr val="accent1">
-              <a:shade val="50000"/>
-            </a:schemeClr>
-          </a:lnRef>
-          <a:fillRef idx="1">
-            <a:schemeClr val="accent1"/>
-          </a:fillRef>
-          <a:effectRef idx="0">
-            <a:schemeClr val="accent1"/>
-          </a:effectRef>
-          <a:fontRef idx="minor">
-            <a:schemeClr val="lt1"/>
-          </a:fontRef>
-        </p:style>
-        <p:txBody>
-          <a:bodyPr rtlCol="0" anchor="ctr"/>
-          <a:lstStyle/>
-          <a:p>
-            <a:pPr algn="ctr"/>
-            <a:r>
-              <a:rPr lang="en-US" altLang="zh-CN" sz="1200" dirty="0">
-                <a:solidFill>
-                  <a:schemeClr val="tx1"/>
-                </a:solidFill>
-                <a:latin typeface="宋体" panose="02010600030101010101" pitchFamily="2" charset="-122"/>
-                <a:ea typeface="宋体" panose="02010600030101010101" pitchFamily="2" charset="-122"/>
-              </a:rPr>
-              <a:t>Redis</a:t>
-            </a:r>
-            <a:endParaRPr lang="zh-CN" altLang="en-US" sz="1200" dirty="0">
-              <a:solidFill>
-                <a:schemeClr val="tx1"/>
-              </a:solidFill>
-              <a:latin typeface="宋体" panose="02010600030101010101" pitchFamily="2" charset="-122"/>
-              <a:ea typeface="宋体" panose="02010600030101010101" pitchFamily="2" charset="-122"/>
-            </a:endParaRPr>
-          </a:p>
-        </p:txBody>
-      </p:sp>
-      <p:cxnSp>
-        <p:nvCxnSpPr>
-          <p:cNvPr id="51" name="直接箭头连接符 50">
-            <a:extLst>
-              <a:ext uri="{FF2B5EF4-FFF2-40B4-BE49-F238E27FC236}">
-                <a16:creationId xmlns:a16="http://schemas.microsoft.com/office/drawing/2014/main" id="{98C7CD57-8BCF-43EC-B11F-7C4A67BD9CDA}"/>
-              </a:ext>
-            </a:extLst>
-          </p:cNvPr>
-          <p:cNvCxnSpPr>
-            <a:cxnSpLocks/>
-          </p:cNvCxnSpPr>
-          <p:nvPr/>
-        </p:nvCxnSpPr>
-        <p:spPr>
-          <a:xfrm>
-            <a:off x="1247070" y="1884363"/>
-            <a:ext cx="0" cy="281800"/>
-          </a:xfrm>
-          <a:prstGeom prst="straightConnector1">
-            <a:avLst/>
-          </a:prstGeom>
-          <a:ln w="12700">
-            <a:tailEnd type="none"/>
-          </a:ln>
-        </p:spPr>
-        <p:style>
-          <a:lnRef idx="1">
-            <a:schemeClr val="dk1"/>
-          </a:lnRef>
-          <a:fillRef idx="0">
-            <a:schemeClr val="dk1"/>
-          </a:fillRef>
-          <a:effectRef idx="0">
-            <a:schemeClr val="dk1"/>
-          </a:effectRef>
-          <a:fontRef idx="minor">
-            <a:schemeClr val="tx1"/>
-          </a:fontRef>
-        </p:style>
-      </p:cxnSp>
-      <p:cxnSp>
-        <p:nvCxnSpPr>
-          <p:cNvPr id="53" name="直接箭头连接符 52">
-            <a:extLst>
-              <a:ext uri="{FF2B5EF4-FFF2-40B4-BE49-F238E27FC236}">
-                <a16:creationId xmlns:a16="http://schemas.microsoft.com/office/drawing/2014/main" id="{31C99EC1-ED7B-4624-948A-ECECF851D938}"/>
-              </a:ext>
-            </a:extLst>
-          </p:cNvPr>
-          <p:cNvCxnSpPr>
-            <a:cxnSpLocks/>
-          </p:cNvCxnSpPr>
-          <p:nvPr/>
-        </p:nvCxnSpPr>
-        <p:spPr>
-          <a:xfrm>
-            <a:off x="4011429" y="1884363"/>
-            <a:ext cx="0" cy="281800"/>
-          </a:xfrm>
-          <a:prstGeom prst="straightConnector1">
-            <a:avLst/>
-          </a:prstGeom>
-          <a:ln w="12700">
-            <a:tailEnd type="none"/>
-          </a:ln>
-        </p:spPr>
-        <p:style>
-          <a:lnRef idx="1">
-            <a:schemeClr val="dk1"/>
-          </a:lnRef>
-          <a:fillRef idx="0">
-            <a:schemeClr val="dk1"/>
-          </a:fillRef>
-          <a:effectRef idx="0">
-            <a:schemeClr val="dk1"/>
-          </a:effectRef>
-          <a:fontRef idx="minor">
-            <a:schemeClr val="tx1"/>
-          </a:fontRef>
-        </p:style>
-      </p:cxnSp>
-      <p:cxnSp>
-        <p:nvCxnSpPr>
-          <p:cNvPr id="55" name="直接箭头连接符 54">
-            <a:extLst>
-              <a:ext uri="{FF2B5EF4-FFF2-40B4-BE49-F238E27FC236}">
-                <a16:creationId xmlns:a16="http://schemas.microsoft.com/office/drawing/2014/main" id="{43A40097-9C0C-4164-95D3-580328B73D0A}"/>
-              </a:ext>
-            </a:extLst>
-          </p:cNvPr>
-          <p:cNvCxnSpPr>
-            <a:cxnSpLocks/>
-          </p:cNvCxnSpPr>
-          <p:nvPr/>
-        </p:nvCxnSpPr>
-        <p:spPr>
-          <a:xfrm>
-            <a:off x="2475775" y="3278456"/>
-            <a:ext cx="0" cy="133893"/>
-          </a:xfrm>
-          <a:prstGeom prst="straightConnector1">
-            <a:avLst/>
-          </a:prstGeom>
-          <a:ln w="12700">
-            <a:tailEnd type="none"/>
-          </a:ln>
-        </p:spPr>
-        <p:style>
-          <a:lnRef idx="1">
-            <a:schemeClr val="dk1"/>
-          </a:lnRef>
-          <a:fillRef idx="0">
-            <a:schemeClr val="dk1"/>
-          </a:fillRef>
-          <a:effectRef idx="0">
-            <a:schemeClr val="dk1"/>
-          </a:effectRef>
-          <a:fontRef idx="minor">
-            <a:schemeClr val="tx1"/>
-          </a:fontRef>
-        </p:style>
-      </p:cxnSp>
-      <p:cxnSp>
-        <p:nvCxnSpPr>
-          <p:cNvPr id="57" name="直接箭头连接符 56">
-            <a:extLst>
-              <a:ext uri="{FF2B5EF4-FFF2-40B4-BE49-F238E27FC236}">
-                <a16:creationId xmlns:a16="http://schemas.microsoft.com/office/drawing/2014/main" id="{F5934B95-BA21-40FF-95B0-92B13497D147}"/>
-              </a:ext>
-            </a:extLst>
-          </p:cNvPr>
-          <p:cNvCxnSpPr/>
-          <p:nvPr/>
-        </p:nvCxnSpPr>
-        <p:spPr>
-          <a:xfrm>
-            <a:off x="2475775" y="3987115"/>
-            <a:ext cx="0" cy="210750"/>
-          </a:xfrm>
-          <a:prstGeom prst="straightConnector1">
-            <a:avLst/>
-          </a:prstGeom>
-          <a:ln w="12700">
-            <a:tailEnd type="none"/>
-          </a:ln>
-        </p:spPr>
-        <p:style>
-          <a:lnRef idx="1">
-            <a:schemeClr val="dk1"/>
-          </a:lnRef>
-          <a:fillRef idx="0">
-            <a:schemeClr val="dk1"/>
-          </a:fillRef>
-          <a:effectRef idx="0">
-            <a:schemeClr val="dk1"/>
-          </a:effectRef>
-          <a:fontRef idx="minor">
-            <a:schemeClr val="tx1"/>
-          </a:fontRef>
-        </p:style>
-      </p:cxnSp>
-      <p:cxnSp>
-        <p:nvCxnSpPr>
-          <p:cNvPr id="58" name="直接箭头连接符 57">
-            <a:extLst>
-              <a:ext uri="{FF2B5EF4-FFF2-40B4-BE49-F238E27FC236}">
-                <a16:creationId xmlns:a16="http://schemas.microsoft.com/office/drawing/2014/main" id="{E0C61688-91E3-430B-9145-04005AADA771}"/>
-              </a:ext>
-            </a:extLst>
-          </p:cNvPr>
-          <p:cNvCxnSpPr>
-            <a:cxnSpLocks/>
-          </p:cNvCxnSpPr>
-          <p:nvPr/>
-        </p:nvCxnSpPr>
-        <p:spPr>
-          <a:xfrm>
-            <a:off x="2475775" y="4782756"/>
-            <a:ext cx="0" cy="280777"/>
-          </a:xfrm>
-          <a:prstGeom prst="straightConnector1">
-            <a:avLst/>
-          </a:prstGeom>
-          <a:ln w="12700">
-            <a:tailEnd type="none"/>
-          </a:ln>
-        </p:spPr>
-        <p:style>
-          <a:lnRef idx="1">
-            <a:schemeClr val="dk1"/>
-          </a:lnRef>
-          <a:fillRef idx="0">
-            <a:schemeClr val="dk1"/>
-          </a:fillRef>
-          <a:effectRef idx="0">
-            <a:schemeClr val="dk1"/>
-          </a:effectRef>
-          <a:fontRef idx="minor">
-            <a:schemeClr val="tx1"/>
-          </a:fontRef>
-        </p:style>
-      </p:cxnSp>
-      <p:sp>
-        <p:nvSpPr>
-          <p:cNvPr id="60" name="矩形 59">
-            <a:extLst>
-              <a:ext uri="{FF2B5EF4-FFF2-40B4-BE49-F238E27FC236}">
-                <a16:creationId xmlns:a16="http://schemas.microsoft.com/office/drawing/2014/main" id="{FDB9A8F2-E8FF-42A5-8AF9-94E36107C132}"/>
-              </a:ext>
-            </a:extLst>
-          </p:cNvPr>
-          <p:cNvSpPr/>
-          <p:nvPr/>
-        </p:nvSpPr>
-        <p:spPr>
-          <a:xfrm>
-            <a:off x="5431988" y="2166163"/>
-            <a:ext cx="373715" cy="2616593"/>
-          </a:xfrm>
-          <a:prstGeom prst="rect">
-            <a:avLst/>
-          </a:prstGeom>
-          <a:solidFill>
-            <a:srgbClr val="F1E2A0"/>
-          </a:solidFill>
-          <a:ln>
-            <a:noFill/>
-          </a:ln>
-        </p:spPr>
-        <p:style>
-          <a:lnRef idx="2">
-            <a:schemeClr val="accent1">
-              <a:shade val="50000"/>
-            </a:schemeClr>
-          </a:lnRef>
-          <a:fillRef idx="1">
-            <a:schemeClr val="accent1"/>
-          </a:fillRef>
-          <a:effectRef idx="0">
-            <a:schemeClr val="accent1"/>
-          </a:effectRef>
-          <a:fontRef idx="minor">
-            <a:schemeClr val="lt1"/>
-          </a:fontRef>
-        </p:style>
-        <p:txBody>
-          <a:bodyPr rtlCol="0" anchor="ctr"/>
-          <a:lstStyle/>
-          <a:p>
-            <a:pPr algn="ctr"/>
-            <a:endParaRPr lang="zh-CN" altLang="en-US"/>
-          </a:p>
-        </p:txBody>
-      </p:sp>
-      <p:sp>
-        <p:nvSpPr>
-          <p:cNvPr id="61" name="文本框 60">
-            <a:extLst>
-              <a:ext uri="{FF2B5EF4-FFF2-40B4-BE49-F238E27FC236}">
-                <a16:creationId xmlns:a16="http://schemas.microsoft.com/office/drawing/2014/main" id="{60724988-2D6F-4B9E-BFFF-96677C999885}"/>
-              </a:ext>
-            </a:extLst>
-          </p:cNvPr>
-          <p:cNvSpPr txBox="1"/>
-          <p:nvPr/>
-        </p:nvSpPr>
-        <p:spPr>
-          <a:xfrm>
-            <a:off x="5429517" y="3184971"/>
-            <a:ext cx="369332" cy="707886"/>
-          </a:xfrm>
-          <a:prstGeom prst="rect">
-            <a:avLst/>
-          </a:prstGeom>
-          <a:noFill/>
-        </p:spPr>
-        <p:txBody>
-          <a:bodyPr vert="eaVert" wrap="none" rtlCol="0">
-            <a:spAutoFit/>
-          </a:bodyPr>
-          <a:lstStyle/>
-          <a:p>
-            <a:r>
-              <a:rPr lang="zh-CN" altLang="en-US" sz="1200" dirty="0">
-                <a:latin typeface="宋体" panose="02010600030101010101" pitchFamily="2" charset="-122"/>
-                <a:ea typeface="宋体" panose="02010600030101010101" pitchFamily="2" charset="-122"/>
-              </a:rPr>
-              <a:t>日志记录</a:t>
-            </a:r>
-          </a:p>
-        </p:txBody>
-      </p:sp>
-      <p:sp>
-        <p:nvSpPr>
-          <p:cNvPr id="62" name="矩形 61">
-            <a:extLst>
-              <a:ext uri="{FF2B5EF4-FFF2-40B4-BE49-F238E27FC236}">
-                <a16:creationId xmlns:a16="http://schemas.microsoft.com/office/drawing/2014/main" id="{5239B2A3-D113-445C-867A-23411A2048B6}"/>
-              </a:ext>
-            </a:extLst>
-          </p:cNvPr>
-          <p:cNvSpPr/>
-          <p:nvPr/>
-        </p:nvSpPr>
-        <p:spPr>
-          <a:xfrm>
-            <a:off x="5929501" y="1983105"/>
-            <a:ext cx="373715" cy="2799651"/>
-          </a:xfrm>
-          <a:prstGeom prst="rect">
-            <a:avLst/>
-          </a:prstGeom>
-          <a:solidFill>
-            <a:srgbClr val="F097CA"/>
-          </a:solidFill>
-          <a:ln>
-            <a:noFill/>
-          </a:ln>
-        </p:spPr>
-        <p:style>
-          <a:lnRef idx="2">
-            <a:schemeClr val="accent1">
-              <a:shade val="50000"/>
-            </a:schemeClr>
-          </a:lnRef>
-          <a:fillRef idx="1">
-            <a:schemeClr val="accent1"/>
-          </a:fillRef>
-          <a:effectRef idx="0">
-            <a:schemeClr val="accent1"/>
-          </a:effectRef>
-          <a:fontRef idx="minor">
-            <a:schemeClr val="lt1"/>
-          </a:fontRef>
-        </p:style>
-        <p:txBody>
-          <a:bodyPr rtlCol="0" anchor="ctr"/>
-          <a:lstStyle/>
-          <a:p>
-            <a:pPr algn="ctr"/>
-            <a:endParaRPr lang="zh-CN" altLang="en-US"/>
-          </a:p>
-        </p:txBody>
-      </p:sp>
-      <p:sp>
-        <p:nvSpPr>
-          <p:cNvPr id="63" name="文本框 62">
-            <a:extLst>
-              <a:ext uri="{FF2B5EF4-FFF2-40B4-BE49-F238E27FC236}">
-                <a16:creationId xmlns:a16="http://schemas.microsoft.com/office/drawing/2014/main" id="{4176C7EB-C935-4BEF-A25E-E07BF6FE0F8E}"/>
-              </a:ext>
-            </a:extLst>
-          </p:cNvPr>
-          <p:cNvSpPr txBox="1"/>
-          <p:nvPr/>
-        </p:nvSpPr>
-        <p:spPr>
-          <a:xfrm>
-            <a:off x="5929338" y="2662297"/>
-            <a:ext cx="369332" cy="707886"/>
-          </a:xfrm>
-          <a:prstGeom prst="rect">
-            <a:avLst/>
-          </a:prstGeom>
-          <a:noFill/>
-        </p:spPr>
-        <p:txBody>
-          <a:bodyPr vert="eaVert" wrap="none" rtlCol="0">
-            <a:spAutoFit/>
-          </a:bodyPr>
-          <a:lstStyle/>
-          <a:p>
-            <a:r>
-              <a:rPr lang="zh-CN" altLang="en-US" sz="1200" dirty="0">
-                <a:latin typeface="宋体" panose="02010600030101010101" pitchFamily="2" charset="-122"/>
-                <a:ea typeface="宋体" panose="02010600030101010101" pitchFamily="2" charset="-122"/>
-              </a:rPr>
-              <a:t>权限控制</a:t>
-            </a:r>
-          </a:p>
-        </p:txBody>
-      </p:sp>
-      <p:sp>
-        <p:nvSpPr>
-          <p:cNvPr id="52" name="矩形 51">
-            <a:extLst>
-              <a:ext uri="{FF2B5EF4-FFF2-40B4-BE49-F238E27FC236}">
-                <a16:creationId xmlns:a16="http://schemas.microsoft.com/office/drawing/2014/main" id="{A97EF94D-BBB3-4546-BC7B-A0C297455969}"/>
-              </a:ext>
-            </a:extLst>
-          </p:cNvPr>
-          <p:cNvSpPr/>
-          <p:nvPr/>
-        </p:nvSpPr>
-        <p:spPr>
-          <a:xfrm>
-            <a:off x="2801801" y="1455571"/>
-            <a:ext cx="800219" cy="285750"/>
-          </a:xfrm>
-          <a:prstGeom prst="rect">
-            <a:avLst/>
-          </a:prstGeom>
-          <a:noFill/>
-          <a:ln>
-            <a:solidFill>
-              <a:schemeClr val="tx1"/>
-            </a:solidFill>
-          </a:ln>
-        </p:spPr>
-        <p:style>
-          <a:lnRef idx="2">
-            <a:schemeClr val="accent1">
-              <a:shade val="50000"/>
-            </a:schemeClr>
-          </a:lnRef>
-          <a:fillRef idx="1">
-            <a:schemeClr val="accent1"/>
-          </a:fillRef>
-          <a:effectRef idx="0">
-            <a:schemeClr val="accent1"/>
-          </a:effectRef>
-          <a:fontRef idx="minor">
-            <a:schemeClr val="lt1"/>
-          </a:fontRef>
-        </p:style>
-        <p:txBody>
-          <a:bodyPr rtlCol="0" anchor="ctr"/>
-          <a:lstStyle/>
-          <a:p>
-            <a:r>
-              <a:rPr lang="en-US" altLang="zh-CN" sz="1200" dirty="0">
-                <a:solidFill>
-                  <a:schemeClr val="tx1"/>
-                </a:solidFill>
-                <a:latin typeface="宋体" panose="02010600030101010101" pitchFamily="2" charset="-122"/>
-                <a:ea typeface="宋体" panose="02010600030101010101" pitchFamily="2" charset="-122"/>
-              </a:rPr>
-              <a:t>Ajax</a:t>
-            </a:r>
-            <a:r>
-              <a:rPr lang="zh-CN" altLang="en-US" sz="1200" dirty="0">
-                <a:solidFill>
-                  <a:schemeClr val="tx1"/>
-                </a:solidFill>
-                <a:latin typeface="宋体" panose="02010600030101010101" pitchFamily="2" charset="-122"/>
-                <a:ea typeface="宋体" panose="02010600030101010101" pitchFamily="2" charset="-122"/>
-              </a:rPr>
-              <a:t>交互</a:t>
-            </a:r>
-          </a:p>
-        </p:txBody>
-      </p:sp>
     </p:spTree>
     <p:extLst>
       <p:ext uri="{BB962C8B-B14F-4D97-AF65-F5344CB8AC3E}">
